--- a/tests/outputs/tro-ly-giang-day.pptx
+++ b/tests/outputs/tro-ly-giang-day.pptx
@@ -12,9 +12,10 @@
     <p:sldId id="260" r:id="rId6"/>
     <p:sldId id="261" r:id="rId7"/>
     <p:sldId id="262" r:id="rId8"/>
+    <p:sldId id="263" r:id="rId9"/>
   </p:sldIdLst>
   <p:notesMasterIdLst>
-    <p:notesMasterId r:id="rId9"/>
+    <p:notesMasterId r:id="rId10"/>
   </p:notesMasterIdLst>
   <p:sldSz cx="9144000" cy="5143500"/>
   <p:notesSz cx="5143500" cy="9144000"/>
@@ -113,23 +114,24 @@
   <p:extLst>
     <p:ext uri="{521415D9-36F7-43E2-AB2F-B90AF26B5E84}">
       <p14:sectionLst xmlns:p14="http://schemas.microsoft.com/office/powerpoint/2010/main">
-        <p14:section name="Buổi học" id="{8bb6a7dc-acf6-4d31-cc13-6f99a11c2b52}">
+        <p14:section name="Buổi học" id="{1e094256-af77-1d9f-d83e-601ac9bd0ff1}">
           <p14:sldIdLst>
             <p14:sldId id="256"/>
             <p14:sldId id="257"/>
             <p14:sldId id="258"/>
           </p14:sldIdLst>
         </p14:section>
-        <p14:section name="Nội dung" id="{7d7a6c15-e152-66cb-2cd0-1b551228e014}">
+        <p14:section name="Nội dung" id="{3e832712-9523-3a5a-d526-d131f0bf3f8c}">
           <p14:sldIdLst>
             <p14:sldId id="259"/>
             <p14:sldId id="260"/>
           </p14:sldIdLst>
         </p14:section>
-        <p14:section name="Hoạt động" id="{cefa93fd-b01e-895c-490d-ca0c29030e56}">
+        <p14:section name="Hoạt động" id="{7c9de7ce-c1f2-4045-435d-f038d549ef9a}">
           <p14:sldIdLst>
             <p14:sldId id="261"/>
             <p14:sldId id="262"/>
+            <p14:sldId id="263"/>
           </p14:sldIdLst>
         </p14:section>
       </p14:sectionLst>
@@ -1106,6 +1108,94 @@
 </p:notes>
 </file>
 
+<file path=ppt/notesSlides/notesSlide8.xml><?xml version="1.0" encoding="utf-8"?>
+<p:notes xmlns:a="http://schemas.openxmlformats.org/drawingml/2006/main" xmlns:r="http://schemas.openxmlformats.org/officeDocument/2006/relationships" xmlns:p="http://schemas.openxmlformats.org/presentationml/2006/main">
+  <p:cSld>
+    <p:spTree>
+      <p:nvGrpSpPr>
+        <p:cNvPr id="1" name=""/>
+        <p:cNvGrpSpPr/>
+        <p:nvPr/>
+      </p:nvGrpSpPr>
+      <p:grpSpPr>
+        <a:xfrm>
+          <a:off x="0" y="0"/>
+          <a:ext cx="0" cy="0"/>
+          <a:chOff x="0" y="0"/>
+          <a:chExt cx="0" cy="0"/>
+        </a:xfrm>
+      </p:grpSpPr>
+      <p:sp>
+        <p:nvSpPr>
+          <p:cNvPr id="2" name="Slide Image Placeholder 1"/>
+          <p:cNvSpPr>
+            <a:spLocks noGrp="1" noRot="1" noChangeAspect="1"/>
+          </p:cNvSpPr>
+          <p:nvPr>
+            <p:ph type="sldImg"/>
+          </p:nvPr>
+        </p:nvSpPr>
+        <p:spPr/>
+      </p:sp>
+      <p:sp>
+        <p:nvSpPr>
+          <p:cNvPr id="3" name="Notes Placeholder 2"/>
+          <p:cNvSpPr>
+            <a:spLocks noGrp="1"/>
+          </p:cNvSpPr>
+          <p:nvPr>
+            <p:ph type="body" idx="1"/>
+          </p:nvPr>
+        </p:nvSpPr>
+        <p:spPr/>
+        <p:txBody>
+          <a:bodyPr/>
+          <a:lstStyle/>
+          <a:p>
+            <a:r>
+              <a:rPr lang="en-US" dirty="0"/>
+              <a:t>Dành thời gian còn lại cho câu hỏi. Nhắc hạn nộp bài tập theo thông báo của giảng viên.</a:t>
+            </a:r>
+            <a:endParaRPr lang="en-US" dirty="0"/>
+          </a:p>
+        </p:txBody>
+      </p:sp>
+      <p:sp>
+        <p:nvSpPr>
+          <p:cNvPr id="4" name="Slide Number Placeholder 3"/>
+          <p:cNvSpPr>
+            <a:spLocks noGrp="1"/>
+          </p:cNvSpPr>
+          <p:nvPr>
+            <p:ph type="sldNum" sz="quarter" idx="10"/>
+          </p:nvPr>
+        </p:nvSpPr>
+        <p:spPr/>
+        <p:txBody>
+          <a:bodyPr/>
+          <a:lstStyle/>
+          <a:p>
+            <a:fld id="{F7021451-1387-4CA6-816F-3879F97B5CBC}" type="slidenum">
+              <a:rPr lang="en-US"/>
+              <a:t>8</a:t>
+            </a:fld>
+            <a:endParaRPr lang="en-US"/>
+          </a:p>
+        </p:txBody>
+      </p:sp>
+    </p:spTree>
+    <p:extLst>
+      <p:ext uri="{BB962C8B-B14F-4D97-AF65-F5344CB8AC3E}">
+        <p14:creationId xmlns:p14="http://schemas.microsoft.com/office/powerpoint/2010/main" val="1024086991"/>
+      </p:ext>
+    </p:extLst>
+  </p:cSld>
+  <p:clrMapOvr>
+    <a:masterClrMapping/>
+  </p:clrMapOvr>
+</p:notes>
+</file>
+
 <file path=ppt/slideLayouts/slideLayout1.xml><?xml version="1.0" encoding="utf-8"?>
 <p:sldLayout xmlns:a="http://schemas.openxmlformats.org/drawingml/2006/main" xmlns:r="http://schemas.openxmlformats.org/officeDocument/2006/relationships" xmlns:p="http://schemas.openxmlformats.org/presentationml/2006/main" preserve="1">
   <p:cSld name="DEFAULT">
@@ -1141,8 +1231,362 @@
   <p:cSld name="TITLE">
     <p:bg>
       <p:bgPr>
+        <a:blipFill dpi="0" rotWithShape="1">
+          <a:blip r:embed="rId2">
+            <a:lum/>
+          </a:blip>
+          <a:srcRect/>
+          <a:stretch>
+            <a:fillRect/>
+          </a:stretch>
+        </a:blipFill>
+        <a:effectLst/>
+      </p:bgPr>
+    </p:bg>
+    <p:spTree>
+      <p:nvGrpSpPr>
+        <p:cNvPr id="1" name=""/>
+        <p:cNvGrpSpPr/>
+        <p:nvPr/>
+      </p:nvGrpSpPr>
+      <p:grpSpPr>
+        <a:xfrm>
+          <a:off x="0" y="0"/>
+          <a:ext cx="0" cy="0"/>
+          <a:chOff x="0" y="0"/>
+          <a:chExt cx="0" cy="0"/>
+        </a:xfrm>
+      </p:grpSpPr>
+      <p:pic>
+        <p:nvPicPr>
+          <p:cNvPr id="2" name="Image 0" descr="Huy hiệu mẫu (thay bằng logo của trường)">    </p:cNvPr>
+          <p:cNvPicPr>
+            <a:picLocks noChangeAspect="1"/>
+          </p:cNvPicPr>
+          <p:nvPr/>
+        </p:nvPicPr>
+        <p:blipFill>
+          <a:blip r:embed="rId1"/>
+          <a:stretch>
+            <a:fillRect/>
+          </a:stretch>
+        </p:blipFill>
+        <p:spPr>
+          <a:xfrm>
+            <a:off x="548640" y="411480"/>
+            <a:ext cx="502920" cy="502920"/>
+          </a:xfrm>
+          <a:prstGeom prst="rect">
+            <a:avLst/>
+          </a:prstGeom>
+        </p:spPr>
+      </p:pic>
+      <p:sp>
+        <p:nvSpPr>
+          <p:cNvPr id="3" name="Text 0"/>
+          <p:cNvSpPr/>
+          <p:nvPr/>
+        </p:nvSpPr>
+        <p:spPr>
+          <a:xfrm>
+            <a:off x="1188720" y="411480"/>
+            <a:ext cx="5486400" cy="502920"/>
+          </a:xfrm>
+          <a:prstGeom prst="rect">
+            <a:avLst/>
+          </a:prstGeom>
+          <a:noFill/>
+          <a:ln/>
+        </p:spPr>
+        <p:txBody>
+          <a:bodyPr wrap="square" lIns="0" tIns="0" rIns="0" bIns="0" rtlCol="0" anchor="ctr"/>
+          <a:lstStyle/>
+          <a:p>
+            <a:pPr indent="0" marL="0">
+              <a:buNone/>
+            </a:pPr>
+            <a:r>
+              <a:rPr lang="en-US" sz="1400" b="1" dirty="0">
+                <a:solidFill>
+                  <a:srgbClr val="FFFFFF"/>
+                </a:solidFill>
+              </a:rPr>
+              <a:t>Trường Đại học Mẫu A (tên mẫu)</a:t>
+            </a:r>
+            <a:endParaRPr lang="en-US" sz="1400" dirty="0"/>
+          </a:p>
+        </p:txBody>
+      </p:sp>
+      <p:sp>
+        <p:nvSpPr>
+          <p:cNvPr id="4" name="Text 1"/>
+          <p:cNvSpPr/>
+          <p:nvPr>
+            <p:ph idx="102" type="title" hasCustomPrompt="1"/>
+          </p:nvPr>
+        </p:nvSpPr>
+        <p:spPr>
+          <a:xfrm>
+            <a:off x="548640" y="1417320"/>
+            <a:ext cx="6035040" cy="1554480"/>
+          </a:xfrm>
+          <a:prstGeom prst="rect">
+            <a:avLst/>
+          </a:prstGeom>
+          <a:noFill/>
+          <a:ln/>
+        </p:spPr>
+        <p:txBody>
+          <a:bodyPr wrap="square" rtlCol="0"/>
+          <a:lstStyle>
+            <a:lvl1pPr algn="l" indent="0" marL="0">
+              <a:buNone/>
+              <a:defRPr lang="en-US" sz="3600" b="1" dirty="0">
+                <a:solidFill>
+                  <a:srgbClr val="FFFFFF"/>
+                </a:solidFill>
+              </a:defRPr>
+            </a:lvl1pPr>
+          </a:lstStyle>
+          <a:p>
+            <a:pPr algn="l" indent="0" marL="0">
+              <a:buNone/>
+            </a:pPr>
+            <a:endParaRPr lang="en-US" sz="3600" dirty="0"/>
+          </a:p>
+        </p:txBody>
+      </p:sp>
+      <p:sp>
+        <p:nvSpPr>
+          <p:cNvPr id="5" name="Text 1"/>
+          <p:cNvSpPr/>
+          <p:nvPr>
+            <p:ph idx="103" type="body" hasCustomPrompt="1"/>
+          </p:nvPr>
+        </p:nvSpPr>
+        <p:spPr>
+          <a:xfrm>
+            <a:off x="548640" y="3154680"/>
+            <a:ext cx="6035040" cy="1097280"/>
+          </a:xfrm>
+          <a:prstGeom prst="rect">
+            <a:avLst/>
+          </a:prstGeom>
+          <a:noFill/>
+          <a:ln/>
+        </p:spPr>
+        <p:txBody>
+          <a:bodyPr wrap="square" rtlCol="0"/>
+          <a:lstStyle>
+            <a:lvl1pPr algn="l" indent="0" marL="0">
+              <a:buNone/>
+              <a:defRPr lang="en-US" sz="1800" dirty="0">
+                <a:solidFill>
+                  <a:srgbClr val="D6E2F0"/>
+                </a:solidFill>
+              </a:defRPr>
+            </a:lvl1pPr>
+          </a:lstStyle>
+          <a:p>
+            <a:pPr algn="l" indent="0" marL="0">
+              <a:buNone/>
+            </a:pPr>
+            <a:endParaRPr lang="en-US" sz="1800" dirty="0"/>
+          </a:p>
+        </p:txBody>
+      </p:sp>
+    </p:spTree>
+  </p:cSld>
+  <p:clrMapOvr>
+    <a:masterClrMapping/>
+  </p:clrMapOvr>
+</p:sldLayout>
+</file>
+
+<file path=ppt/slideLayouts/slideLayout3.xml><?xml version="1.0" encoding="utf-8"?>
+<p:sldLayout xmlns:a="http://schemas.openxmlformats.org/drawingml/2006/main" xmlns:r="http://schemas.openxmlformats.org/officeDocument/2006/relationships" xmlns:p="http://schemas.openxmlformats.org/presentationml/2006/main" preserve="1">
+  <p:cSld name="CLOSING">
+    <p:bg>
+      <p:bgPr>
+        <a:blipFill dpi="0" rotWithShape="1">
+          <a:blip r:embed="rId2">
+            <a:lum/>
+          </a:blip>
+          <a:srcRect/>
+          <a:stretch>
+            <a:fillRect/>
+          </a:stretch>
+        </a:blipFill>
+        <a:effectLst/>
+      </p:bgPr>
+    </p:bg>
+    <p:spTree>
+      <p:nvGrpSpPr>
+        <p:cNvPr id="1" name=""/>
+        <p:cNvGrpSpPr/>
+        <p:nvPr/>
+      </p:nvGrpSpPr>
+      <p:grpSpPr>
+        <a:xfrm>
+          <a:off x="0" y="0"/>
+          <a:ext cx="0" cy="0"/>
+          <a:chOff x="0" y="0"/>
+          <a:chExt cx="0" cy="0"/>
+        </a:xfrm>
+      </p:grpSpPr>
+      <p:pic>
+        <p:nvPicPr>
+          <p:cNvPr id="2" name="Image 0" descr="Huy hiệu mẫu (thay bằng logo của trường)">    </p:cNvPr>
+          <p:cNvPicPr>
+            <a:picLocks noChangeAspect="1"/>
+          </p:cNvPicPr>
+          <p:nvPr/>
+        </p:nvPicPr>
+        <p:blipFill>
+          <a:blip r:embed="rId1"/>
+          <a:stretch>
+            <a:fillRect/>
+          </a:stretch>
+        </p:blipFill>
+        <p:spPr>
+          <a:xfrm>
+            <a:off x="548640" y="411480"/>
+            <a:ext cx="502920" cy="502920"/>
+          </a:xfrm>
+          <a:prstGeom prst="rect">
+            <a:avLst/>
+          </a:prstGeom>
+        </p:spPr>
+      </p:pic>
+      <p:sp>
+        <p:nvSpPr>
+          <p:cNvPr id="3" name="Text 0"/>
+          <p:cNvSpPr/>
+          <p:nvPr/>
+        </p:nvSpPr>
+        <p:spPr>
+          <a:xfrm>
+            <a:off x="1188720" y="411480"/>
+            <a:ext cx="5486400" cy="502920"/>
+          </a:xfrm>
+          <a:prstGeom prst="rect">
+            <a:avLst/>
+          </a:prstGeom>
+          <a:noFill/>
+          <a:ln/>
+        </p:spPr>
+        <p:txBody>
+          <a:bodyPr wrap="square" lIns="0" tIns="0" rIns="0" bIns="0" rtlCol="0" anchor="ctr"/>
+          <a:lstStyle/>
+          <a:p>
+            <a:pPr indent="0" marL="0">
+              <a:buNone/>
+            </a:pPr>
+            <a:r>
+              <a:rPr lang="en-US" sz="1400" b="1" dirty="0">
+                <a:solidFill>
+                  <a:srgbClr val="FFFFFF"/>
+                </a:solidFill>
+              </a:rPr>
+              <a:t>Trường Đại học Mẫu A (tên mẫu)</a:t>
+            </a:r>
+            <a:endParaRPr lang="en-US" sz="1400" dirty="0"/>
+          </a:p>
+        </p:txBody>
+      </p:sp>
+      <p:sp>
+        <p:nvSpPr>
+          <p:cNvPr id="4" name="Text 1"/>
+          <p:cNvSpPr/>
+          <p:nvPr>
+            <p:ph idx="102" type="title" hasCustomPrompt="1"/>
+          </p:nvPr>
+        </p:nvSpPr>
+        <p:spPr>
+          <a:xfrm>
+            <a:off x="548640" y="1417320"/>
+            <a:ext cx="6035040" cy="1554480"/>
+          </a:xfrm>
+          <a:prstGeom prst="rect">
+            <a:avLst/>
+          </a:prstGeom>
+          <a:noFill/>
+          <a:ln/>
+        </p:spPr>
+        <p:txBody>
+          <a:bodyPr wrap="square" rtlCol="0"/>
+          <a:lstStyle>
+            <a:lvl1pPr algn="l" indent="0" marL="0">
+              <a:buNone/>
+              <a:defRPr lang="en-US" sz="3600" b="1" dirty="0">
+                <a:solidFill>
+                  <a:srgbClr val="FFFFFF"/>
+                </a:solidFill>
+              </a:defRPr>
+            </a:lvl1pPr>
+          </a:lstStyle>
+          <a:p>
+            <a:pPr algn="l" indent="0" marL="0">
+              <a:buNone/>
+            </a:pPr>
+            <a:endParaRPr lang="en-US" sz="3600" dirty="0"/>
+          </a:p>
+        </p:txBody>
+      </p:sp>
+      <p:sp>
+        <p:nvSpPr>
+          <p:cNvPr id="5" name="Text 1"/>
+          <p:cNvSpPr/>
+          <p:nvPr>
+            <p:ph idx="103" type="body" hasCustomPrompt="1"/>
+          </p:nvPr>
+        </p:nvSpPr>
+        <p:spPr>
+          <a:xfrm>
+            <a:off x="548640" y="3154680"/>
+            <a:ext cx="6035040" cy="1097280"/>
+          </a:xfrm>
+          <a:prstGeom prst="rect">
+            <a:avLst/>
+          </a:prstGeom>
+          <a:noFill/>
+          <a:ln/>
+        </p:spPr>
+        <p:txBody>
+          <a:bodyPr wrap="square" rtlCol="0"/>
+          <a:lstStyle>
+            <a:lvl1pPr algn="l" indent="0" marL="0">
+              <a:buNone/>
+              <a:defRPr lang="en-US" sz="1800" dirty="0">
+                <a:solidFill>
+                  <a:srgbClr val="D6E2F0"/>
+                </a:solidFill>
+              </a:defRPr>
+            </a:lvl1pPr>
+          </a:lstStyle>
+          <a:p>
+            <a:pPr algn="l" indent="0" marL="0">
+              <a:buNone/>
+            </a:pPr>
+            <a:endParaRPr lang="en-US" sz="1800" dirty="0"/>
+          </a:p>
+        </p:txBody>
+      </p:sp>
+    </p:spTree>
+  </p:cSld>
+  <p:clrMapOvr>
+    <a:masterClrMapping/>
+  </p:clrMapOvr>
+</p:sldLayout>
+</file>
+
+<file path=ppt/slideLayouts/slideLayout4.xml><?xml version="1.0" encoding="utf-8"?>
+<p:sldLayout xmlns:a="http://schemas.openxmlformats.org/drawingml/2006/main" xmlns:r="http://schemas.openxmlformats.org/officeDocument/2006/relationships" xmlns:p="http://schemas.openxmlformats.org/presentationml/2006/main" preserve="1">
+  <p:cSld name="SECTION">
+    <p:bg>
+      <p:bgPr>
         <a:solidFill>
-          <a:srgbClr val="0F3D3E"/>
+          <a:srgbClr val="0B2A4A"/>
         </a:solidFill>
       </p:bgPr>
     </p:bg>
@@ -1165,13 +1609,13 @@
           <p:cNvPr id="2" name="Text 0"/>
           <p:cNvSpPr/>
           <p:nvPr>
-            <p:ph idx="100" type="title" hasCustomPrompt="1"/>
+            <p:ph idx="100" type="body" hasCustomPrompt="1"/>
           </p:nvPr>
         </p:nvSpPr>
         <p:spPr>
           <a:xfrm>
-            <a:off x="548640" y="1371600"/>
-            <a:ext cx="8046720" cy="1371600"/>
+            <a:off x="548640" y="1097280"/>
+            <a:ext cx="2286000" cy="1463040"/>
           </a:xfrm>
           <a:prstGeom prst="rect">
             <a:avLst/>
@@ -1184,10 +1628,13 @@
           <a:lstStyle>
             <a:lvl1pPr algn="l" indent="0" marL="0">
               <a:buNone/>
-              <a:defRPr lang="en-US" sz="3600" b="1" dirty="0">
-                <a:solidFill>
-                  <a:srgbClr val="FFFFFF"/>
-                </a:solidFill>
+              <a:defRPr lang="en-US" sz="8000" b="1" dirty="0">
+                <a:solidFill>
+                  <a:srgbClr val="B8902B"/>
+                </a:solidFill>
+                <a:latin typeface="Cambria" pitchFamily="34" charset="0"/>
+                <a:ea typeface="Cambria" pitchFamily="34" charset="-122"/>
+                <a:cs typeface="Cambria" pitchFamily="34" charset="-120"/>
               </a:defRPr>
             </a:lvl1pPr>
           </a:lstStyle>
@@ -1195,7 +1642,7 @@
             <a:pPr algn="l" indent="0" marL="0">
               <a:buNone/>
             </a:pPr>
-            <a:endParaRPr lang="en-US" sz="3600" dirty="0"/>
+            <a:endParaRPr lang="en-US" sz="8000" dirty="0"/>
           </a:p>
         </p:txBody>
       </p:sp>
@@ -1204,13 +1651,13 @@
           <p:cNvPr id="3" name="Text 0"/>
           <p:cNvSpPr/>
           <p:nvPr>
-            <p:ph idx="101" type="body" hasCustomPrompt="1"/>
+            <p:ph idx="101" type="title" hasCustomPrompt="1"/>
           </p:nvPr>
         </p:nvSpPr>
         <p:spPr>
           <a:xfrm>
-            <a:off x="548640" y="2926080"/>
-            <a:ext cx="8046720" cy="914400"/>
+            <a:off x="2926080" y="1097280"/>
+            <a:ext cx="5669280" cy="1463040"/>
           </a:xfrm>
           <a:prstGeom prst="rect">
             <a:avLst/>
@@ -1223,9 +1670,9 @@
           <a:lstStyle>
             <a:lvl1pPr algn="l" indent="0" marL="0">
               <a:buNone/>
-              <a:defRPr lang="en-US" sz="1800" dirty="0">
-                <a:solidFill>
-                  <a:srgbClr val="CFE3E1"/>
+              <a:defRPr lang="en-US" sz="3400" b="1" dirty="0">
+                <a:solidFill>
+                  <a:srgbClr val="FFFFFF"/>
                 </a:solidFill>
               </a:defRPr>
             </a:lvl1pPr>
@@ -1234,7 +1681,7 @@
             <a:pPr algn="l" indent="0" marL="0">
               <a:buNone/>
             </a:pPr>
-            <a:endParaRPr lang="en-US" sz="1800" dirty="0"/>
+            <a:endParaRPr lang="en-US" sz="3400" dirty="0"/>
           </a:p>
         </p:txBody>
       </p:sp>
@@ -1246,7 +1693,7 @@
 </p:sldLayout>
 </file>
 
-<file path=ppt/slideLayouts/slideLayout3.xml><?xml version="1.0" encoding="utf-8"?>
+<file path=ppt/slideLayouts/slideLayout5.xml><?xml version="1.0" encoding="utf-8"?>
 <p:sldLayout xmlns:a="http://schemas.openxmlformats.org/drawingml/2006/main" xmlns:r="http://schemas.openxmlformats.org/officeDocument/2006/relationships" xmlns:p="http://schemas.openxmlformats.org/presentationml/2006/main" preserve="1">
   <p:cSld name="CONTENT">
     <p:bg>
@@ -1280,8 +1727,8 @@
         </p:nvSpPr>
         <p:spPr>
           <a:xfrm>
-            <a:off x="457200" y="274320"/>
-            <a:ext cx="8229600" cy="868680"/>
+            <a:off x="548640" y="274320"/>
+            <a:ext cx="8046720" cy="868680"/>
           </a:xfrm>
           <a:prstGeom prst="rect">
             <a:avLst/>
@@ -1296,7 +1743,7 @@
               <a:buNone/>
               <a:defRPr lang="en-US" sz="2800" b="1" dirty="0">
                 <a:solidFill>
-                  <a:srgbClr val="0F3D3E"/>
+                  <a:srgbClr val="0B2A4A"/>
                 </a:solidFill>
               </a:defRPr>
             </a:lvl1pPr>
@@ -1306,6 +1753,87 @@
               <a:buNone/>
             </a:pPr>
             <a:endParaRPr lang="en-US" sz="2800" dirty="0"/>
+          </a:p>
+        </p:txBody>
+      </p:sp>
+      <p:sp>
+        <p:nvSpPr>
+          <p:cNvPr id="3" name="Text 0"/>
+          <p:cNvSpPr/>
+          <p:nvPr/>
+        </p:nvSpPr>
+        <p:spPr>
+          <a:xfrm>
+            <a:off x="548640" y="4727448"/>
+            <a:ext cx="5943600" cy="274320"/>
+          </a:xfrm>
+          <a:prstGeom prst="rect">
+            <a:avLst/>
+          </a:prstGeom>
+          <a:noFill/>
+          <a:ln/>
+        </p:spPr>
+        <p:txBody>
+          <a:bodyPr wrap="square" lIns="0" tIns="0" rIns="0" bIns="0" rtlCol="0" anchor="ctr"/>
+          <a:lstStyle/>
+          <a:p>
+            <a:pPr indent="0" marL="0">
+              <a:buNone/>
+            </a:pPr>
+            <a:r>
+              <a:rPr lang="en-US" sz="1100" dirty="0">
+                <a:solidFill>
+                  <a:srgbClr val="6B7A90"/>
+                </a:solidFill>
+              </a:rPr>
+              <a:t>Quản trị dự án · Quản trị rủi ro dự án</a:t>
+            </a:r>
+            <a:endParaRPr lang="en-US" sz="1100" dirty="0"/>
+          </a:p>
+        </p:txBody>
+      </p:sp>
+      <p:sp>
+        <p:nvSpPr>
+          <p:cNvPr id="25" name="Slide Number Placeholder 0"/>
+          <p:cNvSpPr>
+            <a:spLocks noGrp="1"/>
+          </p:cNvSpPr>
+          <p:nvPr>
+            <p:ph type="sldNum" sz="quarter" idx="4294967295"/>
+          </p:nvPr>
+        </p:nvSpPr>
+        <p:spPr>
+          <a:xfrm>
+            <a:off x="8138160" y="4727448"/>
+            <a:ext cx="457200" cy="274320"/>
+          </a:xfrm>
+          <a:prstGeom prst="rect">
+            <a:avLst/>
+          </a:prstGeom>
+          <a:extLst>
+            <a:ext uri="{C572A759-6A51-4108-AA02-DFA0A04FC94B}">
+              <ma14:wrappingTextBoxFlag xmlns:ma14="http://schemas.microsoft.com/office/mac/drawingml/2011/main" val="0"/>
+            </a:ext>
+          </a:extLst>
+        </p:spPr>
+        <p:txBody>
+          <a:bodyPr/>
+          <a:lstStyle>
+            <a:lvl1pPr>
+              <a:defRPr sz="1100">
+                <a:solidFill>
+                  <a:srgbClr val="6B7A90"/>
+                </a:solidFill>
+              </a:defRPr>
+            </a:lvl1pPr>
+          </a:lstStyle>
+          <a:p>
+            <a:pPr algn="r"/>
+            <a:fld id="{F7021451-1387-4CA6-816F-3879F97B5CBC}" type="slidenum">
+              <a:rPr b="0" lang="en-US"/>
+              <a:t>1005</a:t>
+            </a:fld>
+            <a:endParaRPr lang="en-US"/>
           </a:p>
         </p:txBody>
       </p:sp>
@@ -1334,6 +1862,51 @@
           <a:chExt cx="0" cy="0"/>
         </a:xfrm>
       </p:grpSpPr>
+      <p:sp>
+        <p:nvSpPr>
+          <p:cNvPr id="25" name="Slide Number Placeholder 0"/>
+          <p:cNvSpPr>
+            <a:spLocks noGrp="1"/>
+          </p:cNvSpPr>
+          <p:nvPr>
+            <p:ph type="sldNum" sz="quarter" idx="4294967295"/>
+          </p:nvPr>
+        </p:nvSpPr>
+        <p:spPr>
+          <a:xfrm>
+            <a:off x="8138160" y="4727448"/>
+            <a:ext cx="457200" cy="274320"/>
+          </a:xfrm>
+          <a:prstGeom prst="rect">
+            <a:avLst/>
+          </a:prstGeom>
+          <a:extLst>
+            <a:ext uri="{C572A759-6A51-4108-AA02-DFA0A04FC94B}">
+              <ma14:wrappingTextBoxFlag xmlns:ma14="http://schemas.microsoft.com/office/mac/drawingml/2011/main" val="0"/>
+            </a:ext>
+          </a:extLst>
+        </p:spPr>
+        <p:txBody>
+          <a:bodyPr/>
+          <a:lstStyle>
+            <a:lvl1pPr>
+              <a:defRPr sz="1100">
+                <a:solidFill>
+                  <a:srgbClr val="6B7A90"/>
+                </a:solidFill>
+              </a:defRPr>
+            </a:lvl1pPr>
+          </a:lstStyle>
+          <a:p>
+            <a:pPr algn="r"/>
+            <a:fld id="{F7021451-1387-4CA6-816F-3879F97B5CBC}" type="slidenum">
+              <a:rPr b="0" lang="en-US"/>
+              <a:t>null</a:t>
+            </a:fld>
+            <a:endParaRPr lang="en-US"/>
+          </a:p>
+        </p:txBody>
+      </p:sp>
     </p:spTree>
   </p:cSld>
   <p:clrMap bg1="lt1" tx1="dk1" bg2="lt2" tx2="dk2" accent1="accent1" accent2="accent2" accent3="accent3" accent4="accent4" accent5="accent5" accent6="accent6" hlink="hlink" folHlink="folHlink"/>
@@ -1341,6 +1914,8 @@
     <p:sldLayoutId id="2147483649" r:id="rId1"/>
     <p:sldLayoutId id="2147483650" r:id="rId2"/>
     <p:sldLayoutId id="2147483651" r:id="rId3"/>
+    <p:sldLayoutId id="2147483652" r:id="rId4"/>
+    <p:sldLayoutId id="2147483653" r:id="rId5"/>
   </p:sldLayoutIdLst>
   <p:hf sldNum="0" hdr="0" ftr="0" dt="0"/>
   <p:txStyles>
@@ -1615,16 +2190,16 @@
       </p:grpSpPr>
       <p:sp>
         <p:nvSpPr>
-          <p:cNvPr id="2" name="Text 0"/>
+          <p:cNvPr id="2" name="Text 1"/>
           <p:cNvSpPr/>
           <p:nvPr>
-            <p:ph idx="100" type="title" hasCustomPrompt="1"/>
+            <p:ph idx="102" type="title" hasCustomPrompt="1"/>
           </p:nvPr>
         </p:nvSpPr>
         <p:spPr>
           <a:xfrm>
-            <a:off x="548640" y="1371600"/>
-            <a:ext cx="8046720" cy="1371600"/>
+            <a:off x="548640" y="1417320"/>
+            <a:ext cx="6035040" cy="1554480"/>
           </a:xfrm>
           <a:prstGeom prst="rect">
             <a:avLst/>
@@ -1653,16 +2228,16 @@
       </p:sp>
       <p:sp>
         <p:nvSpPr>
-          <p:cNvPr id="3" name="Text 0"/>
+          <p:cNvPr id="3" name="Text 1"/>
           <p:cNvSpPr/>
           <p:nvPr>
-            <p:ph idx="101" type="body" hasCustomPrompt="1"/>
+            <p:ph idx="103" type="body" hasCustomPrompt="1"/>
           </p:nvPr>
         </p:nvSpPr>
         <p:spPr>
           <a:xfrm>
-            <a:off x="548640" y="2926080"/>
-            <a:ext cx="8046720" cy="914400"/>
+            <a:off x="548640" y="3154680"/>
+            <a:ext cx="6035040" cy="1097280"/>
           </a:xfrm>
           <a:prstGeom prst="rect">
             <a:avLst/>
@@ -1680,10 +2255,10 @@
             <a:r>
               <a:rPr lang="en-US" sz="1800" dirty="0">
                 <a:solidFill>
-                  <a:srgbClr val="CFE3E1"/>
-                </a:solidFill>
-              </a:rPr>
-              <a:t>Quản trị dự án · Buổi học 90 phút · Sinh viên năm thứ ba</a:t>
+                  <a:srgbClr val="D6E2F0"/>
+                </a:solidFill>
+              </a:rPr>
+              <a:t>Học phần Quản trị dự án · Buổi học 90 phút · Sinh viên năm thứ ba</a:t>
             </a:r>
             <a:endParaRPr lang="en-US" sz="1800" dirty="0"/>
           </a:p>
@@ -1724,8 +2299,8 @@
         </p:nvSpPr>
         <p:spPr>
           <a:xfrm>
-            <a:off x="457200" y="274320"/>
-            <a:ext cx="8229600" cy="868680"/>
+            <a:off x="548640" y="274320"/>
+            <a:ext cx="8046720" cy="868680"/>
           </a:xfrm>
           <a:prstGeom prst="rect">
             <a:avLst/>
@@ -1743,7 +2318,7 @@
             <a:r>
               <a:rPr lang="en-US" sz="2800" b="1" dirty="0">
                 <a:solidFill>
-                  <a:srgbClr val="0F3D3E"/>
+                  <a:srgbClr val="0B2A4A"/>
                 </a:solidFill>
               </a:rPr>
               <a:t>Cuối buổi, bạn làm được ba việc</a:t>
@@ -1754,24 +2329,26 @@
       </p:sp>
       <p:sp>
         <p:nvSpPr>
-          <p:cNvPr id="4" name="so-thu-tu"/>
+          <p:cNvPr id="4" name="the"/>
           <p:cNvSpPr/>
           <p:nvPr/>
         </p:nvSpPr>
         <p:spPr>
           <a:xfrm>
-            <a:off x="457200" y="1371600"/>
-            <a:ext cx="685800" cy="685800"/>
-          </a:xfrm>
-          <a:prstGeom prst="ellipse">
-            <a:avLst/>
+            <a:off x="548640" y="1325880"/>
+            <a:ext cx="8046720" cy="868680"/>
+          </a:xfrm>
+          <a:prstGeom prst="roundRect">
+            <a:avLst>
+              <a:gd name="adj" fmla="val 8421"/>
+            </a:avLst>
           </a:prstGeom>
           <a:solidFill>
-            <a:srgbClr val="0F6E6E"/>
+            <a:srgbClr val="F1F4F8"/>
           </a:solidFill>
           <a:ln w="12700">
             <a:solidFill>
-              <a:srgbClr val="0F6E6E"/>
+              <a:srgbClr val="F1F4F8"/>
             </a:solidFill>
             <a:prstDash val="solid"/>
           </a:ln>
@@ -1779,96 +2356,24 @@
       </p:sp>
       <p:sp>
         <p:nvSpPr>
-          <p:cNvPr id="5" name="so-thu-tu-chu"/>
-          <p:cNvSpPr txBox="1"/>
-          <p:nvPr/>
-        </p:nvSpPr>
-        <p:spPr>
-          <a:xfrm>
-            <a:off x="457200" y="1371600"/>
-            <a:ext cx="685800" cy="685800"/>
-          </a:xfrm>
-          <a:prstGeom prst="rect">
-            <a:avLst/>
-          </a:prstGeom>
-          <a:noFill/>
-          <a:ln/>
-        </p:spPr>
-        <p:txBody>
-          <a:bodyPr wrap="square" lIns="0" tIns="0" rIns="0" bIns="0" rtlCol="0" anchor="ctr"/>
-          <a:lstStyle/>
-          <a:p>
-            <a:pPr algn="ctr" indent="0" marL="0">
-              <a:buNone/>
-            </a:pPr>
-            <a:r>
-              <a:rPr lang="en-US" sz="2200" b="1" dirty="0">
-                <a:solidFill>
-                  <a:srgbClr val="FFFFFF"/>
-                </a:solidFill>
-              </a:rPr>
-              <a:t>1</a:t>
-            </a:r>
-            <a:endParaRPr lang="en-US" sz="2200" dirty="0"/>
-          </a:p>
-        </p:txBody>
-      </p:sp>
-      <p:sp>
-        <p:nvSpPr>
-          <p:cNvPr id="6" name="muc-tieu"/>
-          <p:cNvSpPr txBox="1"/>
-          <p:nvPr/>
-        </p:nvSpPr>
-        <p:spPr>
-          <a:xfrm>
-            <a:off x="1371600" y="1325880"/>
-            <a:ext cx="7315200" cy="777240"/>
-          </a:xfrm>
-          <a:prstGeom prst="rect">
-            <a:avLst/>
-          </a:prstGeom>
-          <a:noFill/>
-          <a:ln/>
-        </p:spPr>
-        <p:txBody>
-          <a:bodyPr wrap="square" lIns="0" tIns="0" rIns="0" bIns="0" rtlCol="0" anchor="ctr"/>
-          <a:lstStyle/>
-          <a:p>
-            <a:pPr indent="0" marL="0">
-              <a:buNone/>
-            </a:pPr>
-            <a:r>
-              <a:rPr lang="en-US" sz="2000" dirty="0">
-                <a:solidFill>
-                  <a:srgbClr val="1B1F2A"/>
-                </a:solidFill>
-              </a:rPr>
-              <a:t>Nhận diện được rủi ro của dự án</a:t>
-            </a:r>
-            <a:endParaRPr lang="en-US" sz="2000" dirty="0"/>
-          </a:p>
-        </p:txBody>
-      </p:sp>
-      <p:sp>
-        <p:nvSpPr>
-          <p:cNvPr id="7" name="so-thu-tu"/>
+          <p:cNvPr id="5" name="so-thu-tu"/>
           <p:cNvSpPr/>
           <p:nvPr/>
         </p:nvSpPr>
         <p:spPr>
           <a:xfrm>
-            <a:off x="457200" y="2468880"/>
-            <a:ext cx="685800" cy="685800"/>
+            <a:off x="777240" y="1463040"/>
+            <a:ext cx="594360" cy="594360"/>
           </a:xfrm>
           <a:prstGeom prst="ellipse">
             <a:avLst/>
           </a:prstGeom>
           <a:solidFill>
-            <a:srgbClr val="0F6E6E"/>
+            <a:srgbClr val="1F4E8C"/>
           </a:solidFill>
           <a:ln w="12700">
             <a:solidFill>
-              <a:srgbClr val="0F6E6E"/>
+              <a:srgbClr val="1F4E8C"/>
             </a:solidFill>
             <a:prstDash val="solid"/>
           </a:ln>
@@ -1876,14 +2381,14 @@
       </p:sp>
       <p:sp>
         <p:nvSpPr>
-          <p:cNvPr id="8" name="so-thu-tu-chu"/>
+          <p:cNvPr id="6" name="so-thu-tu-chu"/>
           <p:cNvSpPr txBox="1"/>
           <p:nvPr/>
         </p:nvSpPr>
         <p:spPr>
           <a:xfrm>
-            <a:off x="457200" y="2468880"/>
-            <a:ext cx="685800" cy="685800"/>
+            <a:off x="777240" y="1463040"/>
+            <a:ext cx="594360" cy="594360"/>
           </a:xfrm>
           <a:prstGeom prst="rect">
             <a:avLst/>
@@ -1903,8 +2408,11 @@
                 <a:solidFill>
                   <a:srgbClr val="FFFFFF"/>
                 </a:solidFill>
-              </a:rPr>
-              <a:t>2</a:t>
+                <a:latin typeface="Cambria" pitchFamily="34" charset="0"/>
+                <a:ea typeface="Cambria" pitchFamily="34" charset="-122"/>
+                <a:cs typeface="Cambria" pitchFamily="34" charset="-120"/>
+              </a:rPr>
+              <a:t>1</a:t>
             </a:r>
             <a:endParaRPr lang="en-US" sz="2200" dirty="0"/>
           </a:p>
@@ -1912,14 +2420,14 @@
       </p:sp>
       <p:sp>
         <p:nvSpPr>
-          <p:cNvPr id="9" name="muc-tieu"/>
+          <p:cNvPr id="7" name="the-chu"/>
           <p:cNvSpPr txBox="1"/>
           <p:nvPr/>
         </p:nvSpPr>
         <p:spPr>
           <a:xfrm>
-            <a:off x="1371600" y="2423160"/>
-            <a:ext cx="7315200" cy="777240"/>
+            <a:off x="1600200" y="1399032"/>
+            <a:ext cx="6766560" cy="722376"/>
           </a:xfrm>
           <a:prstGeom prst="rect">
             <a:avLst/>
@@ -1935,37 +2443,39 @@
               <a:buNone/>
             </a:pPr>
             <a:r>
-              <a:rPr lang="en-US" sz="2000" dirty="0">
-                <a:solidFill>
-                  <a:srgbClr val="1B1F2A"/>
-                </a:solidFill>
-              </a:rPr>
-              <a:t>Đánh giá được mức độ rủi ro bằng ma trận xác suất – tác động</a:t>
-            </a:r>
-            <a:endParaRPr lang="en-US" sz="2000" dirty="0"/>
-          </a:p>
-        </p:txBody>
-      </p:sp>
-      <p:sp>
-        <p:nvSpPr>
-          <p:cNvPr id="10" name="so-thu-tu"/>
+              <a:rPr lang="en-US" sz="1800" b="1" dirty="0">
+                <a:solidFill>
+                  <a:srgbClr val="0B2A4A"/>
+                </a:solidFill>
+              </a:rPr>
+              <a:t>Nhận diện được rủi ro của dự án</a:t>
+            </a:r>
+            <a:endParaRPr lang="en-US" sz="1800" dirty="0"/>
+          </a:p>
+        </p:txBody>
+      </p:sp>
+      <p:sp>
+        <p:nvSpPr>
+          <p:cNvPr id="8" name="the"/>
           <p:cNvSpPr/>
           <p:nvPr/>
         </p:nvSpPr>
         <p:spPr>
           <a:xfrm>
-            <a:off x="457200" y="3566160"/>
-            <a:ext cx="685800" cy="685800"/>
-          </a:xfrm>
-          <a:prstGeom prst="ellipse">
-            <a:avLst/>
+            <a:off x="548640" y="2331720"/>
+            <a:ext cx="8046720" cy="868680"/>
+          </a:xfrm>
+          <a:prstGeom prst="roundRect">
+            <a:avLst>
+              <a:gd name="adj" fmla="val 8421"/>
+            </a:avLst>
           </a:prstGeom>
           <a:solidFill>
-            <a:srgbClr val="0F6E6E"/>
+            <a:srgbClr val="F1F4F8"/>
           </a:solidFill>
           <a:ln w="12700">
             <a:solidFill>
-              <a:srgbClr val="0F6E6E"/>
+              <a:srgbClr val="F1F4F8"/>
             </a:solidFill>
             <a:prstDash val="solid"/>
           </a:ln>
@@ -1973,14 +2483,39 @@
       </p:sp>
       <p:sp>
         <p:nvSpPr>
-          <p:cNvPr id="11" name="so-thu-tu-chu"/>
+          <p:cNvPr id="9" name="so-thu-tu"/>
+          <p:cNvSpPr/>
+          <p:nvPr/>
+        </p:nvSpPr>
+        <p:spPr>
+          <a:xfrm>
+            <a:off x="777240" y="2468880"/>
+            <a:ext cx="594360" cy="594360"/>
+          </a:xfrm>
+          <a:prstGeom prst="ellipse">
+            <a:avLst/>
+          </a:prstGeom>
+          <a:solidFill>
+            <a:srgbClr val="1F4E8C"/>
+          </a:solidFill>
+          <a:ln w="12700">
+            <a:solidFill>
+              <a:srgbClr val="1F4E8C"/>
+            </a:solidFill>
+            <a:prstDash val="solid"/>
+          </a:ln>
+        </p:spPr>
+      </p:sp>
+      <p:sp>
+        <p:nvSpPr>
+          <p:cNvPr id="10" name="so-thu-tu-chu"/>
           <p:cNvSpPr txBox="1"/>
           <p:nvPr/>
         </p:nvSpPr>
         <p:spPr>
           <a:xfrm>
-            <a:off x="457200" y="3566160"/>
-            <a:ext cx="685800" cy="685800"/>
+            <a:off x="777240" y="2468880"/>
+            <a:ext cx="594360" cy="594360"/>
           </a:xfrm>
           <a:prstGeom prst="rect">
             <a:avLst/>
@@ -2000,6 +2535,136 @@
                 <a:solidFill>
                   <a:srgbClr val="FFFFFF"/>
                 </a:solidFill>
+                <a:latin typeface="Cambria" pitchFamily="34" charset="0"/>
+                <a:ea typeface="Cambria" pitchFamily="34" charset="-122"/>
+                <a:cs typeface="Cambria" pitchFamily="34" charset="-120"/>
+              </a:rPr>
+              <a:t>2</a:t>
+            </a:r>
+            <a:endParaRPr lang="en-US" sz="2200" dirty="0"/>
+          </a:p>
+        </p:txBody>
+      </p:sp>
+      <p:sp>
+        <p:nvSpPr>
+          <p:cNvPr id="11" name="the-chu"/>
+          <p:cNvSpPr txBox="1"/>
+          <p:nvPr/>
+        </p:nvSpPr>
+        <p:spPr>
+          <a:xfrm>
+            <a:off x="1600200" y="2404872"/>
+            <a:ext cx="6766560" cy="722376"/>
+          </a:xfrm>
+          <a:prstGeom prst="rect">
+            <a:avLst/>
+          </a:prstGeom>
+          <a:noFill/>
+          <a:ln/>
+        </p:spPr>
+        <p:txBody>
+          <a:bodyPr wrap="square" lIns="0" tIns="0" rIns="0" bIns="0" rtlCol="0" anchor="ctr"/>
+          <a:lstStyle/>
+          <a:p>
+            <a:pPr indent="0" marL="0">
+              <a:buNone/>
+            </a:pPr>
+            <a:r>
+              <a:rPr lang="en-US" sz="1800" b="1" dirty="0">
+                <a:solidFill>
+                  <a:srgbClr val="0B2A4A"/>
+                </a:solidFill>
+              </a:rPr>
+              <a:t>Đánh giá được mức độ rủi ro bằng ma trận xác suất – tác động</a:t>
+            </a:r>
+            <a:endParaRPr lang="en-US" sz="1800" dirty="0"/>
+          </a:p>
+        </p:txBody>
+      </p:sp>
+      <p:sp>
+        <p:nvSpPr>
+          <p:cNvPr id="12" name="the"/>
+          <p:cNvSpPr/>
+          <p:nvPr/>
+        </p:nvSpPr>
+        <p:spPr>
+          <a:xfrm>
+            <a:off x="548640" y="3337560"/>
+            <a:ext cx="8046720" cy="868680"/>
+          </a:xfrm>
+          <a:prstGeom prst="roundRect">
+            <a:avLst>
+              <a:gd name="adj" fmla="val 8421"/>
+            </a:avLst>
+          </a:prstGeom>
+          <a:solidFill>
+            <a:srgbClr val="F1F4F8"/>
+          </a:solidFill>
+          <a:ln w="12700">
+            <a:solidFill>
+              <a:srgbClr val="F1F4F8"/>
+            </a:solidFill>
+            <a:prstDash val="solid"/>
+          </a:ln>
+        </p:spPr>
+      </p:sp>
+      <p:sp>
+        <p:nvSpPr>
+          <p:cNvPr id="13" name="so-thu-tu"/>
+          <p:cNvSpPr/>
+          <p:nvPr/>
+        </p:nvSpPr>
+        <p:spPr>
+          <a:xfrm>
+            <a:off x="777240" y="3474720"/>
+            <a:ext cx="594360" cy="594360"/>
+          </a:xfrm>
+          <a:prstGeom prst="ellipse">
+            <a:avLst/>
+          </a:prstGeom>
+          <a:solidFill>
+            <a:srgbClr val="1F4E8C"/>
+          </a:solidFill>
+          <a:ln w="12700">
+            <a:solidFill>
+              <a:srgbClr val="1F4E8C"/>
+            </a:solidFill>
+            <a:prstDash val="solid"/>
+          </a:ln>
+        </p:spPr>
+      </p:sp>
+      <p:sp>
+        <p:nvSpPr>
+          <p:cNvPr id="14" name="so-thu-tu-chu"/>
+          <p:cNvSpPr txBox="1"/>
+          <p:nvPr/>
+        </p:nvSpPr>
+        <p:spPr>
+          <a:xfrm>
+            <a:off x="777240" y="3474720"/>
+            <a:ext cx="594360" cy="594360"/>
+          </a:xfrm>
+          <a:prstGeom prst="rect">
+            <a:avLst/>
+          </a:prstGeom>
+          <a:noFill/>
+          <a:ln/>
+        </p:spPr>
+        <p:txBody>
+          <a:bodyPr wrap="square" lIns="0" tIns="0" rIns="0" bIns="0" rtlCol="0" anchor="ctr"/>
+          <a:lstStyle/>
+          <a:p>
+            <a:pPr algn="ctr" indent="0" marL="0">
+              <a:buNone/>
+            </a:pPr>
+            <a:r>
+              <a:rPr lang="en-US" sz="2200" b="1" dirty="0">
+                <a:solidFill>
+                  <a:srgbClr val="FFFFFF"/>
+                </a:solidFill>
+                <a:latin typeface="Cambria" pitchFamily="34" charset="0"/>
+                <a:ea typeface="Cambria" pitchFamily="34" charset="-122"/>
+                <a:cs typeface="Cambria" pitchFamily="34" charset="-120"/>
               </a:rPr>
               <a:t>3</a:t>
             </a:r>
@@ -2009,14 +2674,14 @@
       </p:sp>
       <p:sp>
         <p:nvSpPr>
-          <p:cNvPr id="12" name="muc-tieu"/>
+          <p:cNvPr id="15" name="the-chu"/>
           <p:cNvSpPr txBox="1"/>
           <p:nvPr/>
         </p:nvSpPr>
         <p:spPr>
           <a:xfrm>
-            <a:off x="1371600" y="3520440"/>
-            <a:ext cx="7315200" cy="777240"/>
+            <a:off x="1600200" y="3410712"/>
+            <a:ext cx="6766560" cy="722376"/>
           </a:xfrm>
           <a:prstGeom prst="rect">
             <a:avLst/>
@@ -2032,14 +2697,59 @@
               <a:buNone/>
             </a:pPr>
             <a:r>
-              <a:rPr lang="en-US" sz="2000" dirty="0">
-                <a:solidFill>
-                  <a:srgbClr val="1B1F2A"/>
+              <a:rPr lang="en-US" sz="1800" b="1" dirty="0">
+                <a:solidFill>
+                  <a:srgbClr val="0B2A4A"/>
                 </a:solidFill>
               </a:rPr>
               <a:t>Đề xuất được biện pháp ứng phó</a:t>
             </a:r>
-            <a:endParaRPr lang="en-US" sz="2000" dirty="0"/>
+            <a:endParaRPr lang="en-US" sz="1800" dirty="0"/>
+          </a:p>
+        </p:txBody>
+      </p:sp>
+      <p:sp>
+        <p:nvSpPr>
+          <p:cNvPr id="25" name="Slide Number Placeholder 0"/>
+          <p:cNvSpPr>
+            <a:spLocks noGrp="1"/>
+          </p:cNvSpPr>
+          <p:nvPr>
+            <p:ph type="sldNum" sz="quarter" idx="4294967295"/>
+          </p:nvPr>
+        </p:nvSpPr>
+        <p:spPr>
+          <a:xfrm>
+            <a:off x="8138160" y="4727448"/>
+            <a:ext cx="457200" cy="274320"/>
+          </a:xfrm>
+          <a:prstGeom prst="rect">
+            <a:avLst/>
+          </a:prstGeom>
+          <a:extLst>
+            <a:ext uri="{C572A759-6A51-4108-AA02-DFA0A04FC94B}">
+              <ma14:wrappingTextBoxFlag xmlns:ma14="http://schemas.microsoft.com/office/mac/drawingml/2011/main" val="0"/>
+            </a:ext>
+          </a:extLst>
+        </p:spPr>
+        <p:txBody>
+          <a:bodyPr/>
+          <a:lstStyle>
+            <a:lvl1pPr>
+              <a:defRPr sz="1100">
+                <a:solidFill>
+                  <a:srgbClr val="6B7A90"/>
+                </a:solidFill>
+              </a:defRPr>
+            </a:lvl1pPr>
+          </a:lstStyle>
+          <a:p>
+            <a:pPr algn="r"/>
+            <a:fld id="{F7021451-1387-4CA6-816F-3879F97B5CBC}" type="slidenum">
+              <a:rPr b="0" lang="en-US"/>
+              <a:t>2</a:t>
+            </a:fld>
+            <a:endParaRPr lang="en-US"/>
           </a:p>
         </p:txBody>
       </p:sp>
@@ -2078,8 +2788,8 @@
         </p:nvSpPr>
         <p:spPr>
           <a:xfrm>
-            <a:off x="457200" y="274320"/>
-            <a:ext cx="8229600" cy="868680"/>
+            <a:off x="548640" y="274320"/>
+            <a:ext cx="8046720" cy="868680"/>
           </a:xfrm>
           <a:prstGeom prst="rect">
             <a:avLst/>
@@ -2097,7 +2807,7 @@
             <a:r>
               <a:rPr lang="en-US" sz="2800" b="1" dirty="0">
                 <a:solidFill>
-                  <a:srgbClr val="0F3D3E"/>
+                  <a:srgbClr val="0B2A4A"/>
                 </a:solidFill>
               </a:rPr>
               <a:t>Buổi học gồm năm hoạt động</a:t>
@@ -2114,8 +2824,374 @@
         </p:nvSpPr>
         <p:spPr>
           <a:xfrm>
-            <a:off x="457200" y="1417320"/>
-            <a:ext cx="786384" cy="640080"/>
+            <a:off x="548640" y="1325880"/>
+            <a:ext cx="758952" cy="594360"/>
+          </a:xfrm>
+          <a:prstGeom prst="rect">
+            <a:avLst/>
+          </a:prstGeom>
+          <a:solidFill>
+            <a:srgbClr val="1F4E8C"/>
+          </a:solidFill>
+          <a:ln w="12700">
+            <a:solidFill>
+              <a:srgbClr val="1F4E8C"/>
+            </a:solidFill>
+            <a:prstDash val="solid"/>
+          </a:ln>
+        </p:spPr>
+      </p:sp>
+      <p:sp>
+        <p:nvSpPr>
+          <p:cNvPr id="5" name="thanh-thoi-gian-chu"/>
+          <p:cNvSpPr txBox="1"/>
+          <p:nvPr/>
+        </p:nvSpPr>
+        <p:spPr>
+          <a:xfrm>
+            <a:off x="548640" y="1325880"/>
+            <a:ext cx="758952" cy="594360"/>
+          </a:xfrm>
+          <a:prstGeom prst="rect">
+            <a:avLst/>
+          </a:prstGeom>
+          <a:noFill/>
+          <a:ln/>
+        </p:spPr>
+        <p:txBody>
+          <a:bodyPr wrap="square" lIns="0" tIns="0" rIns="0" bIns="0" rtlCol="0" anchor="ctr"/>
+          <a:lstStyle/>
+          <a:p>
+            <a:pPr algn="ctr" indent="0" marL="0">
+              <a:buNone/>
+            </a:pPr>
+            <a:r>
+              <a:rPr lang="en-US" sz="1600" b="1" dirty="0">
+                <a:solidFill>
+                  <a:srgbClr val="FFFFFF"/>
+                </a:solidFill>
+              </a:rPr>
+              <a:t>10'</a:t>
+            </a:r>
+            <a:endParaRPr lang="en-US" sz="1600" dirty="0"/>
+          </a:p>
+        </p:txBody>
+      </p:sp>
+      <p:sp>
+        <p:nvSpPr>
+          <p:cNvPr id="6" name="cham-mau"/>
+          <p:cNvSpPr/>
+          <p:nvPr/>
+        </p:nvSpPr>
+        <p:spPr>
+          <a:xfrm>
+            <a:off x="548640" y="2194560"/>
+            <a:ext cx="237744" cy="237744"/>
+          </a:xfrm>
+          <a:prstGeom prst="ellipse">
+            <a:avLst/>
+          </a:prstGeom>
+          <a:solidFill>
+            <a:srgbClr val="1F4E8C"/>
+          </a:solidFill>
+          <a:ln w="12700">
+            <a:solidFill>
+              <a:srgbClr val="1F4E8C"/>
+            </a:solidFill>
+            <a:prstDash val="solid"/>
+          </a:ln>
+        </p:spPr>
+      </p:sp>
+      <p:sp>
+        <p:nvSpPr>
+          <p:cNvPr id="7" name="hoat-dong"/>
+          <p:cNvSpPr txBox="1"/>
+          <p:nvPr/>
+        </p:nvSpPr>
+        <p:spPr>
+          <a:xfrm>
+            <a:off x="960120" y="2148840"/>
+            <a:ext cx="7589520" cy="329184"/>
+          </a:xfrm>
+          <a:prstGeom prst="rect">
+            <a:avLst/>
+          </a:prstGeom>
+          <a:noFill/>
+          <a:ln/>
+        </p:spPr>
+        <p:txBody>
+          <a:bodyPr wrap="square" lIns="0" tIns="0" rIns="0" bIns="0" rtlCol="0" anchor="ctr"/>
+          <a:lstStyle/>
+          <a:p>
+            <a:pPr indent="0" marL="0">
+              <a:buNone/>
+            </a:pPr>
+            <a:r>
+              <a:rPr lang="en-US" sz="1600" dirty="0">
+                <a:solidFill>
+                  <a:srgbClr val="1A2433"/>
+                </a:solidFill>
+              </a:rPr>
+              <a:t>Khởi động: tình huống dự án trễ hạn (10 phút)</a:t>
+            </a:r>
+            <a:endParaRPr lang="en-US" sz="1600" dirty="0"/>
+          </a:p>
+        </p:txBody>
+      </p:sp>
+      <p:sp>
+        <p:nvSpPr>
+          <p:cNvPr id="8" name="thanh-thoi-gian"/>
+          <p:cNvSpPr/>
+          <p:nvPr/>
+        </p:nvSpPr>
+        <p:spPr>
+          <a:xfrm>
+            <a:off x="1353312" y="1325880"/>
+            <a:ext cx="1965960" cy="594360"/>
+          </a:xfrm>
+          <a:prstGeom prst="rect">
+            <a:avLst/>
+          </a:prstGeom>
+          <a:solidFill>
+            <a:srgbClr val="2E7D6B"/>
+          </a:solidFill>
+          <a:ln w="12700">
+            <a:solidFill>
+              <a:srgbClr val="2E7D6B"/>
+            </a:solidFill>
+            <a:prstDash val="solid"/>
+          </a:ln>
+        </p:spPr>
+      </p:sp>
+      <p:sp>
+        <p:nvSpPr>
+          <p:cNvPr id="9" name="thanh-thoi-gian-chu"/>
+          <p:cNvSpPr txBox="1"/>
+          <p:nvPr/>
+        </p:nvSpPr>
+        <p:spPr>
+          <a:xfrm>
+            <a:off x="1353312" y="1325880"/>
+            <a:ext cx="1965960" cy="594360"/>
+          </a:xfrm>
+          <a:prstGeom prst="rect">
+            <a:avLst/>
+          </a:prstGeom>
+          <a:noFill/>
+          <a:ln/>
+        </p:spPr>
+        <p:txBody>
+          <a:bodyPr wrap="square" lIns="0" tIns="0" rIns="0" bIns="0" rtlCol="0" anchor="ctr"/>
+          <a:lstStyle/>
+          <a:p>
+            <a:pPr algn="ctr" indent="0" marL="0">
+              <a:buNone/>
+            </a:pPr>
+            <a:r>
+              <a:rPr lang="en-US" sz="1600" b="1" dirty="0">
+                <a:solidFill>
+                  <a:srgbClr val="FFFFFF"/>
+                </a:solidFill>
+              </a:rPr>
+              <a:t>25'</a:t>
+            </a:r>
+            <a:endParaRPr lang="en-US" sz="1600" dirty="0"/>
+          </a:p>
+        </p:txBody>
+      </p:sp>
+      <p:sp>
+        <p:nvSpPr>
+          <p:cNvPr id="10" name="cham-mau"/>
+          <p:cNvSpPr/>
+          <p:nvPr/>
+        </p:nvSpPr>
+        <p:spPr>
+          <a:xfrm>
+            <a:off x="548640" y="2615184"/>
+            <a:ext cx="237744" cy="237744"/>
+          </a:xfrm>
+          <a:prstGeom prst="ellipse">
+            <a:avLst/>
+          </a:prstGeom>
+          <a:solidFill>
+            <a:srgbClr val="2E7D6B"/>
+          </a:solidFill>
+          <a:ln w="12700">
+            <a:solidFill>
+              <a:srgbClr val="2E7D6B"/>
+            </a:solidFill>
+            <a:prstDash val="solid"/>
+          </a:ln>
+        </p:spPr>
+      </p:sp>
+      <p:sp>
+        <p:nvSpPr>
+          <p:cNvPr id="11" name="hoat-dong"/>
+          <p:cNvSpPr txBox="1"/>
+          <p:nvPr/>
+        </p:nvSpPr>
+        <p:spPr>
+          <a:xfrm>
+            <a:off x="960120" y="2569464"/>
+            <a:ext cx="7589520" cy="329184"/>
+          </a:xfrm>
+          <a:prstGeom prst="rect">
+            <a:avLst/>
+          </a:prstGeom>
+          <a:noFill/>
+          <a:ln/>
+        </p:spPr>
+        <p:txBody>
+          <a:bodyPr wrap="square" lIns="0" tIns="0" rIns="0" bIns="0" rtlCol="0" anchor="ctr"/>
+          <a:lstStyle/>
+          <a:p>
+            <a:pPr indent="0" marL="0">
+              <a:buNone/>
+            </a:pPr>
+            <a:r>
+              <a:rPr lang="en-US" sz="1600" dirty="0">
+                <a:solidFill>
+                  <a:srgbClr val="1A2433"/>
+                </a:solidFill>
+              </a:rPr>
+              <a:t>Giảng: nhận diện và phân loại rủi ro (25 phút)</a:t>
+            </a:r>
+            <a:endParaRPr lang="en-US" sz="1600" dirty="0"/>
+          </a:p>
+        </p:txBody>
+      </p:sp>
+      <p:sp>
+        <p:nvSpPr>
+          <p:cNvPr id="12" name="thanh-thoi-gian"/>
+          <p:cNvSpPr/>
+          <p:nvPr/>
+        </p:nvSpPr>
+        <p:spPr>
+          <a:xfrm>
+            <a:off x="3364992" y="1325880"/>
+            <a:ext cx="2770632" cy="594360"/>
+          </a:xfrm>
+          <a:prstGeom prst="rect">
+            <a:avLst/>
+          </a:prstGeom>
+          <a:solidFill>
+            <a:srgbClr val="B8902B"/>
+          </a:solidFill>
+          <a:ln w="12700">
+            <a:solidFill>
+              <a:srgbClr val="B8902B"/>
+            </a:solidFill>
+            <a:prstDash val="solid"/>
+          </a:ln>
+        </p:spPr>
+      </p:sp>
+      <p:sp>
+        <p:nvSpPr>
+          <p:cNvPr id="13" name="thanh-thoi-gian-chu"/>
+          <p:cNvSpPr txBox="1"/>
+          <p:nvPr/>
+        </p:nvSpPr>
+        <p:spPr>
+          <a:xfrm>
+            <a:off x="3364992" y="1325880"/>
+            <a:ext cx="2770632" cy="594360"/>
+          </a:xfrm>
+          <a:prstGeom prst="rect">
+            <a:avLst/>
+          </a:prstGeom>
+          <a:noFill/>
+          <a:ln/>
+        </p:spPr>
+        <p:txBody>
+          <a:bodyPr wrap="square" lIns="0" tIns="0" rIns="0" bIns="0" rtlCol="0" anchor="ctr"/>
+          <a:lstStyle/>
+          <a:p>
+            <a:pPr algn="ctr" indent="0" marL="0">
+              <a:buNone/>
+            </a:pPr>
+            <a:r>
+              <a:rPr lang="en-US" sz="1600" b="1" dirty="0">
+                <a:solidFill>
+                  <a:srgbClr val="FFFFFF"/>
+                </a:solidFill>
+              </a:rPr>
+              <a:t>35'</a:t>
+            </a:r>
+            <a:endParaRPr lang="en-US" sz="1600" dirty="0"/>
+          </a:p>
+        </p:txBody>
+      </p:sp>
+      <p:sp>
+        <p:nvSpPr>
+          <p:cNvPr id="14" name="cham-mau"/>
+          <p:cNvSpPr/>
+          <p:nvPr/>
+        </p:nvSpPr>
+        <p:spPr>
+          <a:xfrm>
+            <a:off x="548640" y="3035808"/>
+            <a:ext cx="237744" cy="237744"/>
+          </a:xfrm>
+          <a:prstGeom prst="ellipse">
+            <a:avLst/>
+          </a:prstGeom>
+          <a:solidFill>
+            <a:srgbClr val="B8902B"/>
+          </a:solidFill>
+          <a:ln w="12700">
+            <a:solidFill>
+              <a:srgbClr val="B8902B"/>
+            </a:solidFill>
+            <a:prstDash val="solid"/>
+          </a:ln>
+        </p:spPr>
+      </p:sp>
+      <p:sp>
+        <p:nvSpPr>
+          <p:cNvPr id="15" name="hoat-dong"/>
+          <p:cNvSpPr txBox="1"/>
+          <p:nvPr/>
+        </p:nvSpPr>
+        <p:spPr>
+          <a:xfrm>
+            <a:off x="960120" y="2990088"/>
+            <a:ext cx="7589520" cy="329184"/>
+          </a:xfrm>
+          <a:prstGeom prst="rect">
+            <a:avLst/>
+          </a:prstGeom>
+          <a:noFill/>
+          <a:ln/>
+        </p:spPr>
+        <p:txBody>
+          <a:bodyPr wrap="square" lIns="0" tIns="0" rIns="0" bIns="0" rtlCol="0" anchor="ctr"/>
+          <a:lstStyle/>
+          <a:p>
+            <a:pPr indent="0" marL="0">
+              <a:buNone/>
+            </a:pPr>
+            <a:r>
+              <a:rPr lang="en-US" sz="1600" dirty="0">
+                <a:solidFill>
+                  <a:srgbClr val="1A2433"/>
+                </a:solidFill>
+              </a:rPr>
+              <a:t>Thực hành: lập ma trận rủi ro theo nhóm (35 phút)</a:t>
+            </a:r>
+            <a:endParaRPr lang="en-US" sz="1600" dirty="0"/>
+          </a:p>
+        </p:txBody>
+      </p:sp>
+      <p:sp>
+        <p:nvSpPr>
+          <p:cNvPr id="16" name="thanh-thoi-gian"/>
+          <p:cNvSpPr/>
+          <p:nvPr/>
+        </p:nvSpPr>
+        <p:spPr>
+          <a:xfrm>
+            <a:off x="6181344" y="1325880"/>
+            <a:ext cx="1563624" cy="594360"/>
           </a:xfrm>
           <a:prstGeom prst="rect">
             <a:avLst/>
@@ -2133,14 +3209,14 @@
       </p:sp>
       <p:sp>
         <p:nvSpPr>
-          <p:cNvPr id="5" name="thanh-thoi-gian-chu"/>
+          <p:cNvPr id="17" name="thanh-thoi-gian-chu"/>
           <p:cNvSpPr txBox="1"/>
           <p:nvPr/>
         </p:nvSpPr>
         <p:spPr>
           <a:xfrm>
-            <a:off x="457200" y="1417320"/>
-            <a:ext cx="786384" cy="640080"/>
+            <a:off x="6181344" y="1325880"/>
+            <a:ext cx="1563624" cy="594360"/>
           </a:xfrm>
           <a:prstGeom prst="rect">
             <a:avLst/>
@@ -2161,7 +3237,7 @@
                   <a:srgbClr val="FFFFFF"/>
                 </a:solidFill>
               </a:rPr>
-              <a:t>10'</a:t>
+              <a:t>20'</a:t>
             </a:r>
             <a:endParaRPr lang="en-US" sz="1600" dirty="0"/>
           </a:p>
@@ -2169,24 +3245,24 @@
       </p:sp>
       <p:sp>
         <p:nvSpPr>
-          <p:cNvPr id="6" name="thanh-thoi-gian"/>
+          <p:cNvPr id="18" name="cham-mau"/>
           <p:cNvSpPr/>
           <p:nvPr/>
         </p:nvSpPr>
         <p:spPr>
           <a:xfrm>
-            <a:off x="1280160" y="1417320"/>
-            <a:ext cx="2020824" cy="640080"/>
-          </a:xfrm>
-          <a:prstGeom prst="rect">
+            <a:off x="548640" y="3456432"/>
+            <a:ext cx="237744" cy="237744"/>
+          </a:xfrm>
+          <a:prstGeom prst="ellipse">
             <a:avLst/>
           </a:prstGeom>
           <a:solidFill>
-            <a:srgbClr val="0F6E6E"/>
+            <a:srgbClr val="5B8DB8"/>
           </a:solidFill>
           <a:ln w="12700">
             <a:solidFill>
-              <a:srgbClr val="0F6E6E"/>
+              <a:srgbClr val="5B8DB8"/>
             </a:solidFill>
             <a:prstDash val="solid"/>
           </a:ln>
@@ -2194,14 +3270,14 @@
       </p:sp>
       <p:sp>
         <p:nvSpPr>
-          <p:cNvPr id="7" name="thanh-thoi-gian-chu"/>
+          <p:cNvPr id="19" name="hoat-dong"/>
           <p:cNvSpPr txBox="1"/>
           <p:nvPr/>
         </p:nvSpPr>
         <p:spPr>
           <a:xfrm>
-            <a:off x="1280160" y="1417320"/>
-            <a:ext cx="2020824" cy="640080"/>
+            <a:off x="960120" y="3410712"/>
+            <a:ext cx="7589520" cy="329184"/>
           </a:xfrm>
           <a:prstGeom prst="rect">
             <a:avLst/>
@@ -2213,16 +3289,16 @@
           <a:bodyPr wrap="square" lIns="0" tIns="0" rIns="0" bIns="0" rtlCol="0" anchor="ctr"/>
           <a:lstStyle/>
           <a:p>
-            <a:pPr algn="ctr" indent="0" marL="0">
-              <a:buNone/>
-            </a:pPr>
-            <a:r>
-              <a:rPr lang="en-US" sz="1600" b="1" dirty="0">
-                <a:solidFill>
-                  <a:srgbClr val="FFFFFF"/>
-                </a:solidFill>
-              </a:rPr>
-              <a:t>25'</a:t>
+            <a:pPr indent="0" marL="0">
+              <a:buNone/>
+            </a:pPr>
+            <a:r>
+              <a:rPr lang="en-US" sz="1600" dirty="0">
+                <a:solidFill>
+                  <a:srgbClr val="1A2433"/>
+                </a:solidFill>
+              </a:rPr>
+              <a:t>Thảo luận và phản hồi (20 phút)</a:t>
             </a:r>
             <a:endParaRPr lang="en-US" sz="1600" dirty="0"/>
           </a:p>
@@ -2230,24 +3306,24 @@
       </p:sp>
       <p:sp>
         <p:nvSpPr>
-          <p:cNvPr id="8" name="thanh-thoi-gian"/>
+          <p:cNvPr id="20" name="thanh-thoi-gian"/>
           <p:cNvSpPr/>
           <p:nvPr/>
         </p:nvSpPr>
         <p:spPr>
           <a:xfrm>
-            <a:off x="3337560" y="1417320"/>
-            <a:ext cx="2843784" cy="640080"/>
+            <a:off x="7790688" y="1325880"/>
+            <a:ext cx="758952" cy="594360"/>
           </a:xfrm>
           <a:prstGeom prst="rect">
             <a:avLst/>
           </a:prstGeom>
           <a:solidFill>
-            <a:srgbClr val="D9822B"/>
+            <a:srgbClr val="6B7A90"/>
           </a:solidFill>
           <a:ln w="12700">
             <a:solidFill>
-              <a:srgbClr val="D9822B"/>
+              <a:srgbClr val="6B7A90"/>
             </a:solidFill>
             <a:prstDash val="solid"/>
           </a:ln>
@@ -2255,14 +3331,14 @@
       </p:sp>
       <p:sp>
         <p:nvSpPr>
-          <p:cNvPr id="9" name="thanh-thoi-gian-chu"/>
+          <p:cNvPr id="21" name="thanh-thoi-gian-chu"/>
           <p:cNvSpPr txBox="1"/>
           <p:nvPr/>
         </p:nvSpPr>
         <p:spPr>
           <a:xfrm>
-            <a:off x="3337560" y="1417320"/>
-            <a:ext cx="2843784" cy="640080"/>
+            <a:off x="7790688" y="1325880"/>
+            <a:ext cx="758952" cy="594360"/>
           </a:xfrm>
           <a:prstGeom prst="rect">
             <a:avLst/>
@@ -2283,7 +3359,7 @@
                   <a:srgbClr val="FFFFFF"/>
                 </a:solidFill>
               </a:rPr>
-              <a:t>35'</a:t>
+              <a:t>10'</a:t>
             </a:r>
             <a:endParaRPr lang="en-US" sz="1600" dirty="0"/>
           </a:p>
@@ -2291,24 +3367,24 @@
       </p:sp>
       <p:sp>
         <p:nvSpPr>
-          <p:cNvPr id="10" name="thanh-thoi-gian"/>
+          <p:cNvPr id="22" name="cham-mau"/>
           <p:cNvSpPr/>
           <p:nvPr/>
         </p:nvSpPr>
         <p:spPr>
           <a:xfrm>
-            <a:off x="6217920" y="1417320"/>
-            <a:ext cx="1609344" cy="640080"/>
-          </a:xfrm>
-          <a:prstGeom prst="rect">
+            <a:off x="548640" y="3877056"/>
+            <a:ext cx="237744" cy="237744"/>
+          </a:xfrm>
+          <a:prstGeom prst="ellipse">
             <a:avLst/>
           </a:prstGeom>
           <a:solidFill>
-            <a:srgbClr val="3E7C4F"/>
+            <a:srgbClr val="6B7A90"/>
           </a:solidFill>
           <a:ln w="12700">
             <a:solidFill>
-              <a:srgbClr val="3E7C4F"/>
+              <a:srgbClr val="6B7A90"/>
             </a:solidFill>
             <a:prstDash val="solid"/>
           </a:ln>
@@ -2316,14 +3392,14 @@
       </p:sp>
       <p:sp>
         <p:nvSpPr>
-          <p:cNvPr id="11" name="thanh-thoi-gian-chu"/>
+          <p:cNvPr id="23" name="hoat-dong"/>
           <p:cNvSpPr txBox="1"/>
           <p:nvPr/>
         </p:nvSpPr>
         <p:spPr>
           <a:xfrm>
-            <a:off x="6217920" y="1417320"/>
-            <a:ext cx="1609344" cy="640080"/>
+            <a:off x="960120" y="3831336"/>
+            <a:ext cx="7589520" cy="329184"/>
           </a:xfrm>
           <a:prstGeom prst="rect">
             <a:avLst/>
@@ -2335,16 +3411,16 @@
           <a:bodyPr wrap="square" lIns="0" tIns="0" rIns="0" bIns="0" rtlCol="0" anchor="ctr"/>
           <a:lstStyle/>
           <a:p>
-            <a:pPr algn="ctr" indent="0" marL="0">
-              <a:buNone/>
-            </a:pPr>
-            <a:r>
-              <a:rPr lang="en-US" sz="1600" b="1" dirty="0">
-                <a:solidFill>
-                  <a:srgbClr val="FFFFFF"/>
-                </a:solidFill>
-              </a:rPr>
-              <a:t>20'</a:t>
+            <a:pPr indent="0" marL="0">
+              <a:buNone/>
+            </a:pPr>
+            <a:r>
+              <a:rPr lang="en-US" sz="1600" dirty="0">
+                <a:solidFill>
+                  <a:srgbClr val="1A2433"/>
+                </a:solidFill>
+              </a:rPr>
+              <a:t>Tổng kết và bài tập (10 phút)</a:t>
             </a:r>
             <a:endParaRPr lang="en-US" sz="1600" dirty="0"/>
           </a:p>
@@ -2352,39 +3428,14 @@
       </p:sp>
       <p:sp>
         <p:nvSpPr>
-          <p:cNvPr id="12" name="thanh-thoi-gian"/>
-          <p:cNvSpPr/>
-          <p:nvPr/>
-        </p:nvSpPr>
-        <p:spPr>
-          <a:xfrm>
-            <a:off x="7863840" y="1417320"/>
-            <a:ext cx="786384" cy="640080"/>
-          </a:xfrm>
-          <a:prstGeom prst="rect">
-            <a:avLst/>
-          </a:prstGeom>
-          <a:solidFill>
-            <a:srgbClr val="7A8B8B"/>
-          </a:solidFill>
-          <a:ln w="12700">
-            <a:solidFill>
-              <a:srgbClr val="7A8B8B"/>
-            </a:solidFill>
-            <a:prstDash val="solid"/>
-          </a:ln>
-        </p:spPr>
-      </p:sp>
-      <p:sp>
-        <p:nvSpPr>
-          <p:cNvPr id="13" name="thanh-thoi-gian-chu"/>
+          <p:cNvPr id="24" name="nguon"/>
           <p:cNvSpPr txBox="1"/>
           <p:nvPr/>
         </p:nvSpPr>
         <p:spPr>
           <a:xfrm>
-            <a:off x="7863840" y="1417320"/>
-            <a:ext cx="786384" cy="640080"/>
+            <a:off x="548640" y="4416552"/>
+            <a:ext cx="8046720" cy="274320"/>
           </a:xfrm>
           <a:prstGeom prst="rect">
             <a:avLst/>
@@ -2396,166 +3447,63 @@
           <a:bodyPr wrap="square" lIns="0" tIns="0" rIns="0" bIns="0" rtlCol="0" anchor="ctr"/>
           <a:lstStyle/>
           <a:p>
-            <a:pPr algn="ctr" indent="0" marL="0">
-              <a:buNone/>
-            </a:pPr>
-            <a:r>
-              <a:rPr lang="en-US" sz="1600" b="1" dirty="0">
-                <a:solidFill>
-                  <a:srgbClr val="FFFFFF"/>
-                </a:solidFill>
-              </a:rPr>
-              <a:t>10'</a:t>
-            </a:r>
-            <a:endParaRPr lang="en-US" sz="1600" dirty="0"/>
-          </a:p>
-        </p:txBody>
-      </p:sp>
-      <p:sp>
-        <p:nvSpPr>
-          <p:cNvPr id="14" name="noi-dung"/>
-          <p:cNvSpPr txBox="1"/>
-          <p:nvPr/>
-        </p:nvSpPr>
-        <p:spPr>
-          <a:xfrm>
-            <a:off x="457200" y="2331720"/>
-            <a:ext cx="8229600" cy="2148840"/>
-          </a:xfrm>
-          <a:prstGeom prst="rect">
-            <a:avLst/>
-          </a:prstGeom>
-          <a:noFill/>
-          <a:ln/>
-        </p:spPr>
-        <p:txBody>
-          <a:bodyPr wrap="square" lIns="0" tIns="0" rIns="0" bIns="0" rtlCol="0" anchor="t"/>
-          <a:lstStyle/>
-          <a:p>
-            <a:pPr marL="342900" indent="-342900">
-              <a:spcAft>
-                <a:spcPts val="800"/>
-              </a:spcAft>
-              <a:buSzPct val="100000"/>
-              <a:buChar char="•"/>
-            </a:pPr>
-            <a:r>
-              <a:rPr lang="en-US" sz="1600" dirty="0">
-                <a:solidFill>
-                  <a:srgbClr val="1B1F2A"/>
-                </a:solidFill>
-              </a:rPr>
-              <a:t>Khởi động: tình huống dự án trễ hạn (10 phút)</a:t>
-            </a:r>
-            <a:endParaRPr lang="en-US" sz="1600" dirty="0"/>
-          </a:p>
-          <a:p>
-            <a:pPr marL="342900" indent="-342900">
-              <a:spcAft>
-                <a:spcPts val="800"/>
-              </a:spcAft>
-              <a:buSzPct val="100000"/>
-              <a:buChar char="•"/>
-            </a:pPr>
-            <a:r>
-              <a:rPr lang="en-US" sz="1600" dirty="0">
-                <a:solidFill>
-                  <a:srgbClr val="1B1F2A"/>
-                </a:solidFill>
-              </a:rPr>
-              <a:t>Giảng: nhận diện và phân loại rủi ro (25 phút)</a:t>
-            </a:r>
-            <a:endParaRPr lang="en-US" sz="1600" dirty="0"/>
-          </a:p>
-          <a:p>
-            <a:pPr marL="342900" indent="-342900">
-              <a:spcAft>
-                <a:spcPts val="800"/>
-              </a:spcAft>
-              <a:buSzPct val="100000"/>
-              <a:buChar char="•"/>
-            </a:pPr>
-            <a:r>
-              <a:rPr lang="en-US" sz="1600" dirty="0">
-                <a:solidFill>
-                  <a:srgbClr val="1B1F2A"/>
-                </a:solidFill>
-              </a:rPr>
-              <a:t>Thực hành: lập ma trận rủi ro theo nhóm (35 phút)</a:t>
-            </a:r>
-            <a:endParaRPr lang="en-US" sz="1600" dirty="0"/>
-          </a:p>
-          <a:p>
-            <a:pPr marL="342900" indent="-342900">
-              <a:spcAft>
-                <a:spcPts val="800"/>
-              </a:spcAft>
-              <a:buSzPct val="100000"/>
-              <a:buChar char="•"/>
-            </a:pPr>
-            <a:r>
-              <a:rPr lang="en-US" sz="1600" dirty="0">
-                <a:solidFill>
-                  <a:srgbClr val="1B1F2A"/>
-                </a:solidFill>
-              </a:rPr>
-              <a:t>Thảo luận và phản hồi (20 phút)</a:t>
-            </a:r>
-            <a:endParaRPr lang="en-US" sz="1600" dirty="0"/>
-          </a:p>
-          <a:p>
-            <a:pPr marL="342900" indent="-342900">
-              <a:spcAft>
-                <a:spcPts val="800"/>
-              </a:spcAft>
-              <a:buSzPct val="100000"/>
-              <a:buChar char="•"/>
-            </a:pPr>
-            <a:r>
-              <a:rPr lang="en-US" sz="1600" dirty="0">
-                <a:solidFill>
-                  <a:srgbClr val="1B1F2A"/>
-                </a:solidFill>
-              </a:rPr>
-              <a:t>Tổng kết và bài tập (10 phút)</a:t>
-            </a:r>
-            <a:endParaRPr lang="en-US" sz="1600" dirty="0"/>
-          </a:p>
-        </p:txBody>
-      </p:sp>
-      <p:sp>
-        <p:nvSpPr>
-          <p:cNvPr id="15" name="nguon"/>
-          <p:cNvSpPr txBox="1"/>
-          <p:nvPr/>
-        </p:nvSpPr>
-        <p:spPr>
-          <a:xfrm>
-            <a:off x="457200" y="4617720"/>
-            <a:ext cx="8229600" cy="320040"/>
-          </a:xfrm>
-          <a:prstGeom prst="rect">
-            <a:avLst/>
-          </a:prstGeom>
-          <a:noFill/>
-          <a:ln/>
-        </p:spPr>
-        <p:txBody>
-          <a:bodyPr wrap="square" lIns="0" tIns="0" rIns="0" bIns="0" rtlCol="0" anchor="ctr"/>
-          <a:lstStyle/>
-          <a:p>
             <a:pPr indent="0" marL="0">
               <a:buNone/>
             </a:pPr>
             <a:r>
               <a:rPr lang="en-US" sz="1100" i="1" dirty="0">
                 <a:solidFill>
-                  <a:srgbClr val="5A6666"/>
+                  <a:srgbClr val="6B7A90"/>
                 </a:solidFill>
               </a:rPr>
               <a:t>Tổng các hoạt động: 100 phút; thời lượng buổi học: 90 phút</a:t>
             </a:r>
             <a:endParaRPr lang="en-US" sz="1100" dirty="0"/>
+          </a:p>
+        </p:txBody>
+      </p:sp>
+      <p:sp>
+        <p:nvSpPr>
+          <p:cNvPr id="25" name="Slide Number Placeholder 0"/>
+          <p:cNvSpPr>
+            <a:spLocks noGrp="1"/>
+          </p:cNvSpPr>
+          <p:nvPr>
+            <p:ph type="sldNum" sz="quarter" idx="4294967295"/>
+          </p:nvPr>
+        </p:nvSpPr>
+        <p:spPr>
+          <a:xfrm>
+            <a:off x="8138160" y="4727448"/>
+            <a:ext cx="457200" cy="274320"/>
+          </a:xfrm>
+          <a:prstGeom prst="rect">
+            <a:avLst/>
+          </a:prstGeom>
+          <a:extLst>
+            <a:ext uri="{C572A759-6A51-4108-AA02-DFA0A04FC94B}">
+              <ma14:wrappingTextBoxFlag xmlns:ma14="http://schemas.microsoft.com/office/mac/drawingml/2011/main" val="0"/>
+            </a:ext>
+          </a:extLst>
+        </p:spPr>
+        <p:txBody>
+          <a:bodyPr/>
+          <a:lstStyle>
+            <a:lvl1pPr>
+              <a:defRPr sz="1100">
+                <a:solidFill>
+                  <a:srgbClr val="6B7A90"/>
+                </a:solidFill>
+              </a:defRPr>
+            </a:lvl1pPr>
+          </a:lstStyle>
+          <a:p>
+            <a:pPr algn="r"/>
+            <a:fld id="{F7021451-1387-4CA6-816F-3879F97B5CBC}" type="slidenum">
+              <a:rPr b="0" lang="en-US"/>
+              <a:t>3</a:t>
+            </a:fld>
+            <a:endParaRPr lang="en-US"/>
           </a:p>
         </p:txBody>
       </p:sp>
@@ -2594,8 +3542,8 @@
         </p:nvSpPr>
         <p:spPr>
           <a:xfrm>
-            <a:off x="457200" y="274320"/>
-            <a:ext cx="8229600" cy="868680"/>
+            <a:off x="548640" y="274320"/>
+            <a:ext cx="8046720" cy="868680"/>
           </a:xfrm>
           <a:prstGeom prst="rect">
             <a:avLst/>
@@ -2613,7 +3561,7 @@
             <a:r>
               <a:rPr lang="en-US" sz="2800" b="1" dirty="0">
                 <a:solidFill>
-                  <a:srgbClr val="0F3D3E"/>
+                  <a:srgbClr val="0B2A4A"/>
                 </a:solidFill>
               </a:rPr>
               <a:t>Rủi ro là sự kiện có thể xảy ra và ảnh hưởng đến mục tiêu</a:t>
@@ -2624,41 +3572,101 @@
       </p:sp>
       <p:sp>
         <p:nvSpPr>
-          <p:cNvPr id="4" name="the"/>
+          <p:cNvPr id="4" name="nhan-xet"/>
           <p:cNvSpPr/>
           <p:nvPr/>
         </p:nvSpPr>
         <p:spPr>
           <a:xfrm>
-            <a:off x="457200" y="1463040"/>
-            <a:ext cx="3931920" cy="2194560"/>
+            <a:off x="548640" y="1463040"/>
+            <a:ext cx="3840480" cy="2103120"/>
           </a:xfrm>
           <a:prstGeom prst="roundRect">
             <a:avLst>
-              <a:gd name="adj" fmla="val 4167"/>
+              <a:gd name="adj" fmla="val 3478"/>
             </a:avLst>
           </a:prstGeom>
           <a:solidFill>
-            <a:srgbClr val="EEF3F2"/>
+            <a:srgbClr val="F1F4F8"/>
           </a:solidFill>
           <a:ln w="12700">
             <a:solidFill>
-              <a:srgbClr val="EEF3F2"/>
+              <a:srgbClr val="F1F4F8"/>
             </a:solidFill>
             <a:prstDash val="solid"/>
           </a:ln>
         </p:spPr>
       </p:sp>
-      <p:sp>
-        <p:nvSpPr>
-          <p:cNvPr id="5" name="the-chu"/>
+      <p:pic>
+        <p:nvPicPr>
+          <p:cNvPr id="5" name="bieu-tuong" descr="Biểu tượng">    </p:cNvPr>
+          <p:cNvPicPr>
+            <a:picLocks noChangeAspect="1"/>
+          </p:cNvPicPr>
+          <p:nvPr/>
+        </p:nvPicPr>
+        <p:blipFill>
+          <a:blip r:embed="rId1"/>
+          <a:stretch>
+            <a:fillRect/>
+          </a:stretch>
+        </p:blipFill>
+        <p:spPr>
+          <a:xfrm>
+            <a:off x="731520" y="1664208"/>
+            <a:ext cx="274320" cy="274320"/>
+          </a:xfrm>
+          <a:prstGeom prst="rect">
+            <a:avLst/>
+          </a:prstGeom>
+        </p:spPr>
+      </p:pic>
+      <p:sp>
+        <p:nvSpPr>
+          <p:cNvPr id="6" name="nhan-xet-tieu-de"/>
           <p:cNvSpPr txBox="1"/>
           <p:nvPr/>
         </p:nvSpPr>
         <p:spPr>
           <a:xfrm>
-            <a:off x="640080" y="1645920"/>
-            <a:ext cx="3566160" cy="1828800"/>
+            <a:off x="1097280" y="1645920"/>
+            <a:ext cx="3108960" cy="329184"/>
+          </a:xfrm>
+          <a:prstGeom prst="rect">
+            <a:avLst/>
+          </a:prstGeom>
+          <a:noFill/>
+          <a:ln/>
+        </p:spPr>
+        <p:txBody>
+          <a:bodyPr wrap="square" lIns="0" tIns="0" rIns="0" bIns="0" rtlCol="0" anchor="ctr"/>
+          <a:lstStyle/>
+          <a:p>
+            <a:pPr indent="0" marL="0">
+              <a:buNone/>
+            </a:pPr>
+            <a:r>
+              <a:rPr lang="en-US" sz="1800" b="1" dirty="0">
+                <a:solidFill>
+                  <a:srgbClr val="0B2A4A"/>
+                </a:solidFill>
+              </a:rPr>
+              <a:t>Rủi ro</a:t>
+            </a:r>
+            <a:endParaRPr lang="en-US" sz="1800" dirty="0"/>
+          </a:p>
+        </p:txBody>
+      </p:sp>
+      <p:sp>
+        <p:nvSpPr>
+          <p:cNvPr id="7" name="nhan-xet-chu"/>
+          <p:cNvSpPr txBox="1"/>
+          <p:nvPr/>
+        </p:nvSpPr>
+        <p:spPr>
+          <a:xfrm>
+            <a:off x="731520" y="2103120"/>
+            <a:ext cx="3474720" cy="1371600"/>
           </a:xfrm>
           <a:prstGeom prst="rect">
             <a:avLst/>
@@ -2670,86 +3678,140 @@
           <a:bodyPr wrap="square" lIns="0" tIns="0" rIns="0" bIns="0" rtlCol="0" anchor="t"/>
           <a:lstStyle/>
           <a:p>
-            <a:pPr indent="0" marL="0">
-              <a:buNone/>
-            </a:pPr>
-            <a:r>
-              <a:rPr lang="en-US" sz="2600" b="1" dirty="0">
-                <a:solidFill>
-                  <a:srgbClr val="0F6E6E"/>
-                </a:solidFill>
-              </a:rPr>
-              <a:t>Rủi ro</a:t>
-            </a:r>
-            <a:endParaRPr lang="en-US" sz="2600" dirty="0"/>
-          </a:p>
-          <a:p>
-            <a:pPr indent="0" marL="0">
-              <a:buNone/>
-            </a:pPr>
-            <a:r>
-              <a:rPr lang="en-US" sz="2000" dirty="0">
-                <a:solidFill>
-                  <a:srgbClr val="1B1F2A"/>
+            <a:pPr marL="342900" indent="-342900">
+              <a:spcAft>
+                <a:spcPts val="800"/>
+              </a:spcAft>
+              <a:buSzPct val="100000"/>
+              <a:buChar char="•"/>
+            </a:pPr>
+            <a:r>
+              <a:rPr lang="en-US" sz="1600" dirty="0">
+                <a:solidFill>
+                  <a:srgbClr val="1A2433"/>
                 </a:solidFill>
               </a:rPr>
               <a:t>Chưa xảy ra</a:t>
             </a:r>
-            <a:endParaRPr lang="en-US" sz="2600" dirty="0"/>
-          </a:p>
-          <a:p>
-            <a:pPr indent="0" marL="0">
-              <a:buNone/>
-            </a:pPr>
-            <a:r>
-              <a:rPr lang="en-US" sz="2000" dirty="0">
-                <a:solidFill>
-                  <a:srgbClr val="1B1F2A"/>
+            <a:endParaRPr lang="en-US" sz="1600" dirty="0"/>
+          </a:p>
+          <a:p>
+            <a:pPr marL="342900" indent="-342900">
+              <a:spcAft>
+                <a:spcPts val="800"/>
+              </a:spcAft>
+              <a:buSzPct val="100000"/>
+              <a:buChar char="•"/>
+            </a:pPr>
+            <a:r>
+              <a:rPr lang="en-US" sz="1600" dirty="0">
+                <a:solidFill>
+                  <a:srgbClr val="1A2433"/>
                 </a:solidFill>
               </a:rPr>
               <a:t>Có xác suất và tác động</a:t>
             </a:r>
-            <a:endParaRPr lang="en-US" sz="2600" dirty="0"/>
-          </a:p>
-        </p:txBody>
-      </p:sp>
-      <p:sp>
-        <p:nvSpPr>
-          <p:cNvPr id="6" name="the"/>
+            <a:endParaRPr lang="en-US" sz="1600" dirty="0"/>
+          </a:p>
+        </p:txBody>
+      </p:sp>
+      <p:sp>
+        <p:nvSpPr>
+          <p:cNvPr id="8" name="luu-y"/>
           <p:cNvSpPr/>
           <p:nvPr/>
         </p:nvSpPr>
         <p:spPr>
           <a:xfrm>
             <a:off x="4754880" y="1463040"/>
-            <a:ext cx="3931920" cy="2194560"/>
+            <a:ext cx="3840480" cy="2103120"/>
           </a:xfrm>
           <a:prstGeom prst="roundRect">
             <a:avLst>
-              <a:gd name="adj" fmla="val 4167"/>
+              <a:gd name="adj" fmla="val 3478"/>
             </a:avLst>
           </a:prstGeom>
           <a:solidFill>
-            <a:srgbClr val="FBEEDD"/>
+            <a:srgbClr val="FBF1E1"/>
           </a:solidFill>
           <a:ln w="12700">
             <a:solidFill>
-              <a:srgbClr val="FBEEDD"/>
+              <a:srgbClr val="B8902B"/>
             </a:solidFill>
             <a:prstDash val="solid"/>
           </a:ln>
         </p:spPr>
       </p:sp>
-      <p:sp>
-        <p:nvSpPr>
-          <p:cNvPr id="7" name="the-chu"/>
+      <p:pic>
+        <p:nvPicPr>
+          <p:cNvPr id="9" name="bieu-tuong" descr="Biểu tượng">    </p:cNvPr>
+          <p:cNvPicPr>
+            <a:picLocks noChangeAspect="1"/>
+          </p:cNvPicPr>
+          <p:nvPr/>
+        </p:nvPicPr>
+        <p:blipFill>
+          <a:blip r:embed="rId2"/>
+          <a:stretch>
+            <a:fillRect/>
+          </a:stretch>
+        </p:blipFill>
+        <p:spPr>
+          <a:xfrm>
+            <a:off x="4937760" y="1664208"/>
+            <a:ext cx="274320" cy="274320"/>
+          </a:xfrm>
+          <a:prstGeom prst="rect">
+            <a:avLst/>
+          </a:prstGeom>
+        </p:spPr>
+      </p:pic>
+      <p:sp>
+        <p:nvSpPr>
+          <p:cNvPr id="10" name="nhan-xet-tieu-de"/>
           <p:cNvSpPr txBox="1"/>
           <p:nvPr/>
         </p:nvSpPr>
         <p:spPr>
           <a:xfrm>
-            <a:off x="4937760" y="1645920"/>
-            <a:ext cx="3566160" cy="1828800"/>
+            <a:off x="5303520" y="1645920"/>
+            <a:ext cx="3108960" cy="329184"/>
+          </a:xfrm>
+          <a:prstGeom prst="rect">
+            <a:avLst/>
+          </a:prstGeom>
+          <a:noFill/>
+          <a:ln/>
+        </p:spPr>
+        <p:txBody>
+          <a:bodyPr wrap="square" lIns="0" tIns="0" rIns="0" bIns="0" rtlCol="0" anchor="ctr"/>
+          <a:lstStyle/>
+          <a:p>
+            <a:pPr indent="0" marL="0">
+              <a:buNone/>
+            </a:pPr>
+            <a:r>
+              <a:rPr lang="en-US" sz="1800" b="1" dirty="0">
+                <a:solidFill>
+                  <a:srgbClr val="A23B3B"/>
+                </a:solidFill>
+              </a:rPr>
+              <a:t>Vấn đề</a:t>
+            </a:r>
+            <a:endParaRPr lang="en-US" sz="1800" dirty="0"/>
+          </a:p>
+        </p:txBody>
+      </p:sp>
+      <p:sp>
+        <p:nvSpPr>
+          <p:cNvPr id="11" name="nhan-xet-chu"/>
+          <p:cNvSpPr txBox="1"/>
+          <p:nvPr/>
+        </p:nvSpPr>
+        <p:spPr>
+          <a:xfrm>
+            <a:off x="4937760" y="2103120"/>
+            <a:ext cx="3474720" cy="1371600"/>
           </a:xfrm>
           <a:prstGeom prst="rect">
             <a:avLst/>
@@ -2761,46 +3823,85 @@
           <a:bodyPr wrap="square" lIns="0" tIns="0" rIns="0" bIns="0" rtlCol="0" anchor="t"/>
           <a:lstStyle/>
           <a:p>
-            <a:pPr indent="0" marL="0">
-              <a:buNone/>
-            </a:pPr>
-            <a:r>
-              <a:rPr lang="en-US" sz="2600" b="1" dirty="0">
-                <a:solidFill>
-                  <a:srgbClr val="B5473A"/>
-                </a:solidFill>
-              </a:rPr>
-              <a:t>Vấn đề</a:t>
-            </a:r>
-            <a:endParaRPr lang="en-US" sz="2600" dirty="0"/>
-          </a:p>
-          <a:p>
-            <a:pPr indent="0" marL="0">
-              <a:buNone/>
-            </a:pPr>
-            <a:r>
-              <a:rPr lang="en-US" sz="2000" dirty="0">
-                <a:solidFill>
-                  <a:srgbClr val="1B1F2A"/>
+            <a:pPr marL="342900" indent="-342900">
+              <a:spcAft>
+                <a:spcPts val="800"/>
+              </a:spcAft>
+              <a:buSzPct val="100000"/>
+              <a:buChar char="•"/>
+            </a:pPr>
+            <a:r>
+              <a:rPr lang="en-US" sz="1600" dirty="0">
+                <a:solidFill>
+                  <a:srgbClr val="1A2433"/>
                 </a:solidFill>
               </a:rPr>
               <a:t>Đã xảy ra</a:t>
             </a:r>
-            <a:endParaRPr lang="en-US" sz="2600" dirty="0"/>
-          </a:p>
-          <a:p>
-            <a:pPr indent="0" marL="0">
-              <a:buNone/>
-            </a:pPr>
-            <a:r>
-              <a:rPr lang="en-US" sz="2000" dirty="0">
-                <a:solidFill>
-                  <a:srgbClr val="1B1F2A"/>
+            <a:endParaRPr lang="en-US" sz="1600" dirty="0"/>
+          </a:p>
+          <a:p>
+            <a:pPr marL="342900" indent="-342900">
+              <a:spcAft>
+                <a:spcPts val="800"/>
+              </a:spcAft>
+              <a:buSzPct val="100000"/>
+              <a:buChar char="•"/>
+            </a:pPr>
+            <a:r>
+              <a:rPr lang="en-US" sz="1600" dirty="0">
+                <a:solidFill>
+                  <a:srgbClr val="1A2433"/>
                 </a:solidFill>
               </a:rPr>
               <a:t>Cần xử lý ngay</a:t>
             </a:r>
-            <a:endParaRPr lang="en-US" sz="2600" dirty="0"/>
+            <a:endParaRPr lang="en-US" sz="1600" dirty="0"/>
+          </a:p>
+        </p:txBody>
+      </p:sp>
+      <p:sp>
+        <p:nvSpPr>
+          <p:cNvPr id="25" name="Slide Number Placeholder 0"/>
+          <p:cNvSpPr>
+            <a:spLocks noGrp="1"/>
+          </p:cNvSpPr>
+          <p:nvPr>
+            <p:ph type="sldNum" sz="quarter" idx="4294967295"/>
+          </p:nvPr>
+        </p:nvSpPr>
+        <p:spPr>
+          <a:xfrm>
+            <a:off x="8138160" y="4727448"/>
+            <a:ext cx="457200" cy="274320"/>
+          </a:xfrm>
+          <a:prstGeom prst="rect">
+            <a:avLst/>
+          </a:prstGeom>
+          <a:extLst>
+            <a:ext uri="{C572A759-6A51-4108-AA02-DFA0A04FC94B}">
+              <ma14:wrappingTextBoxFlag xmlns:ma14="http://schemas.microsoft.com/office/mac/drawingml/2011/main" val="0"/>
+            </a:ext>
+          </a:extLst>
+        </p:spPr>
+        <p:txBody>
+          <a:bodyPr/>
+          <a:lstStyle>
+            <a:lvl1pPr>
+              <a:defRPr sz="1100">
+                <a:solidFill>
+                  <a:srgbClr val="6B7A90"/>
+                </a:solidFill>
+              </a:defRPr>
+            </a:lvl1pPr>
+          </a:lstStyle>
+          <a:p>
+            <a:pPr algn="r"/>
+            <a:fld id="{F7021451-1387-4CA6-816F-3879F97B5CBC}" type="slidenum">
+              <a:rPr b="0" lang="en-US"/>
+              <a:t>4</a:t>
+            </a:fld>
+            <a:endParaRPr lang="en-US"/>
           </a:p>
         </p:txBody>
       </p:sp>
@@ -2839,8 +3940,8 @@
         </p:nvSpPr>
         <p:spPr>
           <a:xfrm>
-            <a:off x="457200" y="274320"/>
-            <a:ext cx="8229600" cy="868680"/>
+            <a:off x="548640" y="274320"/>
+            <a:ext cx="8046720" cy="868680"/>
           </a:xfrm>
           <a:prstGeom prst="rect">
             <a:avLst/>
@@ -2858,7 +3959,7 @@
             <a:r>
               <a:rPr lang="en-US" sz="2800" b="1" dirty="0">
                 <a:solidFill>
-                  <a:srgbClr val="0F3D3E"/>
+                  <a:srgbClr val="0B2A4A"/>
                 </a:solidFill>
               </a:rPr>
               <a:t>Ma trận rủi ro: xác suất nhân với tác động</a:t>
@@ -2869,14 +3970,14 @@
       </p:sp>
       <p:sp>
         <p:nvSpPr>
-          <p:cNvPr id="4" name="truc-x"/>
+          <p:cNvPr id="4" name="truc-y-nhan"/>
           <p:cNvSpPr txBox="1"/>
           <p:nvPr/>
         </p:nvSpPr>
         <p:spPr>
           <a:xfrm>
-            <a:off x="457200" y="4572000"/>
-            <a:ext cx="8229600" cy="320040"/>
+            <a:off x="548640" y="1188720"/>
+            <a:ext cx="1828800" cy="274320"/>
           </a:xfrm>
           <a:prstGeom prst="rect">
             <a:avLst/>
@@ -2888,16 +3989,16 @@
           <a:bodyPr wrap="square" lIns="0" tIns="0" rIns="0" bIns="0" rtlCol="0" anchor="ctr"/>
           <a:lstStyle/>
           <a:p>
-            <a:pPr algn="ctr" indent="0" marL="0">
+            <a:pPr indent="0" marL="0">
               <a:buNone/>
             </a:pPr>
             <a:r>
               <a:rPr lang="en-US" sz="1400" dirty="0">
                 <a:solidFill>
-                  <a:srgbClr val="4A5656"/>
-                </a:solidFill>
-              </a:rPr>
-              <a:t>Tác động →</a:t>
+                  <a:srgbClr val="6B7A90"/>
+                </a:solidFill>
+              </a:rPr>
+              <a:t>Xác suất ↑</a:t>
             </a:r>
             <a:endParaRPr lang="en-US" sz="1400" dirty="0"/>
           </a:p>
@@ -2911,8 +4012,8 @@
         </p:nvSpPr>
         <p:spPr>
           <a:xfrm>
-            <a:off x="457200" y="1554480"/>
-            <a:ext cx="1005840" cy="822960"/>
+            <a:off x="548640" y="1508760"/>
+            <a:ext cx="914400" cy="822960"/>
           </a:xfrm>
           <a:prstGeom prst="rect">
             <a:avLst/>
@@ -2930,7 +4031,7 @@
             <a:r>
               <a:rPr lang="en-US" sz="1400" dirty="0">
                 <a:solidFill>
-                  <a:srgbClr val="4A5656"/>
+                  <a:srgbClr val="6B7A90"/>
                 </a:solidFill>
               </a:rPr>
               <a:t>Cao</a:t>
@@ -2947,7 +4048,7 @@
         </p:nvSpPr>
         <p:spPr>
           <a:xfrm>
-            <a:off x="1554480" y="1554480"/>
+            <a:off x="1554480" y="1508760"/>
             <a:ext cx="2286000" cy="822960"/>
           </a:xfrm>
           <a:prstGeom prst="rect">
@@ -2972,7 +4073,7 @@
         </p:nvSpPr>
         <p:spPr>
           <a:xfrm>
-            <a:off x="1554480" y="1554480"/>
+            <a:off x="1554480" y="1508760"/>
             <a:ext cx="2286000" cy="822960"/>
           </a:xfrm>
           <a:prstGeom prst="rect">
@@ -2991,7 +4092,7 @@
             <a:r>
               <a:rPr lang="en-US" sz="1800" b="1" dirty="0">
                 <a:solidFill>
-                  <a:srgbClr val="1B1F2A"/>
+                  <a:srgbClr val="1A2433"/>
                 </a:solidFill>
               </a:rPr>
               <a:t>Trung bình</a:t>
@@ -3008,7 +4109,7 @@
         </p:nvSpPr>
         <p:spPr>
           <a:xfrm>
-            <a:off x="3931920" y="1554480"/>
+            <a:off x="3931920" y="1508760"/>
             <a:ext cx="2286000" cy="822960"/>
           </a:xfrm>
           <a:prstGeom prst="rect">
@@ -3033,7 +4134,7 @@
         </p:nvSpPr>
         <p:spPr>
           <a:xfrm>
-            <a:off x="3931920" y="1554480"/>
+            <a:off x="3931920" y="1508760"/>
             <a:ext cx="2286000" cy="822960"/>
           </a:xfrm>
           <a:prstGeom prst="rect">
@@ -3052,7 +4153,7 @@
             <a:r>
               <a:rPr lang="en-US" sz="1800" b="1" dirty="0">
                 <a:solidFill>
-                  <a:srgbClr val="1B1F2A"/>
+                  <a:srgbClr val="1A2433"/>
                 </a:solidFill>
               </a:rPr>
               <a:t>Cao</a:t>
@@ -3069,14 +4170,14 @@
         </p:nvSpPr>
         <p:spPr>
           <a:xfrm>
-            <a:off x="6309360" y="1554480"/>
+            <a:off x="6309360" y="1508760"/>
             <a:ext cx="2286000" cy="822960"/>
           </a:xfrm>
           <a:prstGeom prst="rect">
             <a:avLst/>
           </a:prstGeom>
           <a:solidFill>
-            <a:srgbClr val="B5473A"/>
+            <a:srgbClr val="A23B3B"/>
           </a:solidFill>
           <a:ln w="12700">
             <a:solidFill>
@@ -3094,7 +4195,7 @@
         </p:nvSpPr>
         <p:spPr>
           <a:xfrm>
-            <a:off x="6309360" y="1554480"/>
+            <a:off x="6309360" y="1508760"/>
             <a:ext cx="2286000" cy="822960"/>
           </a:xfrm>
           <a:prstGeom prst="rect">
@@ -3113,7 +4214,7 @@
             <a:r>
               <a:rPr lang="en-US" sz="1800" b="1" dirty="0">
                 <a:solidFill>
-                  <a:srgbClr val="1B1F2A"/>
+                  <a:srgbClr val="FFFFFF"/>
                 </a:solidFill>
               </a:rPr>
               <a:t>Rất cao</a:t>
@@ -3130,8 +4231,8 @@
         </p:nvSpPr>
         <p:spPr>
           <a:xfrm>
-            <a:off x="457200" y="2423160"/>
-            <a:ext cx="1005840" cy="822960"/>
+            <a:off x="548640" y="2377440"/>
+            <a:ext cx="914400" cy="822960"/>
           </a:xfrm>
           <a:prstGeom prst="rect">
             <a:avLst/>
@@ -3149,7 +4250,7 @@
             <a:r>
               <a:rPr lang="en-US" sz="1400" dirty="0">
                 <a:solidFill>
-                  <a:srgbClr val="4A5656"/>
+                  <a:srgbClr val="6B7A90"/>
                 </a:solidFill>
               </a:rPr>
               <a:t>Vừa</a:t>
@@ -3166,7 +4267,7 @@
         </p:nvSpPr>
         <p:spPr>
           <a:xfrm>
-            <a:off x="1554480" y="2423160"/>
+            <a:off x="1554480" y="2377440"/>
             <a:ext cx="2286000" cy="822960"/>
           </a:xfrm>
           <a:prstGeom prst="rect">
@@ -3191,7 +4292,7 @@
         </p:nvSpPr>
         <p:spPr>
           <a:xfrm>
-            <a:off x="1554480" y="2423160"/>
+            <a:off x="1554480" y="2377440"/>
             <a:ext cx="2286000" cy="822960"/>
           </a:xfrm>
           <a:prstGeom prst="rect">
@@ -3210,7 +4311,7 @@
             <a:r>
               <a:rPr lang="en-US" sz="1800" b="1" dirty="0">
                 <a:solidFill>
-                  <a:srgbClr val="1B1F2A"/>
+                  <a:srgbClr val="1A2433"/>
                 </a:solidFill>
               </a:rPr>
               <a:t>Thấp</a:t>
@@ -3227,7 +4328,7 @@
         </p:nvSpPr>
         <p:spPr>
           <a:xfrm>
-            <a:off x="3931920" y="2423160"/>
+            <a:off x="3931920" y="2377440"/>
             <a:ext cx="2286000" cy="822960"/>
           </a:xfrm>
           <a:prstGeom prst="rect">
@@ -3252,7 +4353,7 @@
         </p:nvSpPr>
         <p:spPr>
           <a:xfrm>
-            <a:off x="3931920" y="2423160"/>
+            <a:off x="3931920" y="2377440"/>
             <a:ext cx="2286000" cy="822960"/>
           </a:xfrm>
           <a:prstGeom prst="rect">
@@ -3271,7 +4372,7 @@
             <a:r>
               <a:rPr lang="en-US" sz="1800" b="1" dirty="0">
                 <a:solidFill>
-                  <a:srgbClr val="1B1F2A"/>
+                  <a:srgbClr val="1A2433"/>
                 </a:solidFill>
               </a:rPr>
               <a:t>Trung bình</a:t>
@@ -3288,7 +4389,7 @@
         </p:nvSpPr>
         <p:spPr>
           <a:xfrm>
-            <a:off x="6309360" y="2423160"/>
+            <a:off x="6309360" y="2377440"/>
             <a:ext cx="2286000" cy="822960"/>
           </a:xfrm>
           <a:prstGeom prst="rect">
@@ -3313,7 +4414,7 @@
         </p:nvSpPr>
         <p:spPr>
           <a:xfrm>
-            <a:off x="6309360" y="2423160"/>
+            <a:off x="6309360" y="2377440"/>
             <a:ext cx="2286000" cy="822960"/>
           </a:xfrm>
           <a:prstGeom prst="rect">
@@ -3332,7 +4433,7 @@
             <a:r>
               <a:rPr lang="en-US" sz="1800" b="1" dirty="0">
                 <a:solidFill>
-                  <a:srgbClr val="1B1F2A"/>
+                  <a:srgbClr val="1A2433"/>
                 </a:solidFill>
               </a:rPr>
               <a:t>Cao</a:t>
@@ -3349,8 +4450,8 @@
         </p:nvSpPr>
         <p:spPr>
           <a:xfrm>
-            <a:off x="457200" y="3291840"/>
-            <a:ext cx="1005840" cy="822960"/>
+            <a:off x="548640" y="3246120"/>
+            <a:ext cx="914400" cy="822960"/>
           </a:xfrm>
           <a:prstGeom prst="rect">
             <a:avLst/>
@@ -3368,7 +4469,7 @@
             <a:r>
               <a:rPr lang="en-US" sz="1400" dirty="0">
                 <a:solidFill>
-                  <a:srgbClr val="4A5656"/>
+                  <a:srgbClr val="6B7A90"/>
                 </a:solidFill>
               </a:rPr>
               <a:t>Thấp</a:t>
@@ -3385,7 +4486,7 @@
         </p:nvSpPr>
         <p:spPr>
           <a:xfrm>
-            <a:off x="1554480" y="3291840"/>
+            <a:off x="1554480" y="3246120"/>
             <a:ext cx="2286000" cy="822960"/>
           </a:xfrm>
           <a:prstGeom prst="rect">
@@ -3410,7 +4511,7 @@
         </p:nvSpPr>
         <p:spPr>
           <a:xfrm>
-            <a:off x="1554480" y="3291840"/>
+            <a:off x="1554480" y="3246120"/>
             <a:ext cx="2286000" cy="822960"/>
           </a:xfrm>
           <a:prstGeom prst="rect">
@@ -3429,7 +4530,7 @@
             <a:r>
               <a:rPr lang="en-US" sz="1800" b="1" dirty="0">
                 <a:solidFill>
-                  <a:srgbClr val="1B1F2A"/>
+                  <a:srgbClr val="1A2433"/>
                 </a:solidFill>
               </a:rPr>
               <a:t>Thấp</a:t>
@@ -3446,7 +4547,7 @@
         </p:nvSpPr>
         <p:spPr>
           <a:xfrm>
-            <a:off x="3931920" y="3291840"/>
+            <a:off x="3931920" y="3246120"/>
             <a:ext cx="2286000" cy="822960"/>
           </a:xfrm>
           <a:prstGeom prst="rect">
@@ -3471,7 +4572,7 @@
         </p:nvSpPr>
         <p:spPr>
           <a:xfrm>
-            <a:off x="3931920" y="3291840"/>
+            <a:off x="3931920" y="3246120"/>
             <a:ext cx="2286000" cy="822960"/>
           </a:xfrm>
           <a:prstGeom prst="rect">
@@ -3490,7 +4591,7 @@
             <a:r>
               <a:rPr lang="en-US" sz="1800" b="1" dirty="0">
                 <a:solidFill>
-                  <a:srgbClr val="1B1F2A"/>
+                  <a:srgbClr val="1A2433"/>
                 </a:solidFill>
               </a:rPr>
               <a:t>Thấp</a:t>
@@ -3507,7 +4608,7 @@
         </p:nvSpPr>
         <p:spPr>
           <a:xfrm>
-            <a:off x="6309360" y="3291840"/>
+            <a:off x="6309360" y="3246120"/>
             <a:ext cx="2286000" cy="822960"/>
           </a:xfrm>
           <a:prstGeom prst="rect">
@@ -3532,7 +4633,7 @@
         </p:nvSpPr>
         <p:spPr>
           <a:xfrm>
-            <a:off x="6309360" y="3291840"/>
+            <a:off x="6309360" y="3246120"/>
             <a:ext cx="2286000" cy="822960"/>
           </a:xfrm>
           <a:prstGeom prst="rect">
@@ -3551,7 +4652,7 @@
             <a:r>
               <a:rPr lang="en-US" sz="1800" b="1" dirty="0">
                 <a:solidFill>
-                  <a:srgbClr val="1B1F2A"/>
+                  <a:srgbClr val="1A2433"/>
                 </a:solidFill>
               </a:rPr>
               <a:t>Trung bình</a:t>
@@ -3568,8 +4669,8 @@
         </p:nvSpPr>
         <p:spPr>
           <a:xfrm>
-            <a:off x="1554480" y="4187952"/>
-            <a:ext cx="2286000" cy="320040"/>
+            <a:off x="1554480" y="4133088"/>
+            <a:ext cx="2286000" cy="274320"/>
           </a:xfrm>
           <a:prstGeom prst="rect">
             <a:avLst/>
@@ -3587,7 +4688,7 @@
             <a:r>
               <a:rPr lang="en-US" sz="1400" dirty="0">
                 <a:solidFill>
-                  <a:srgbClr val="4A5656"/>
+                  <a:srgbClr val="6B7A90"/>
                 </a:solidFill>
               </a:rPr>
               <a:t>Thấp</a:t>
@@ -3604,8 +4705,8 @@
         </p:nvSpPr>
         <p:spPr>
           <a:xfrm>
-            <a:off x="3931920" y="4187952"/>
-            <a:ext cx="2286000" cy="320040"/>
+            <a:off x="3931920" y="4133088"/>
+            <a:ext cx="2286000" cy="274320"/>
           </a:xfrm>
           <a:prstGeom prst="rect">
             <a:avLst/>
@@ -3623,7 +4724,7 @@
             <a:r>
               <a:rPr lang="en-US" sz="1400" dirty="0">
                 <a:solidFill>
-                  <a:srgbClr val="4A5656"/>
+                  <a:srgbClr val="6B7A90"/>
                 </a:solidFill>
               </a:rPr>
               <a:t>Vừa</a:t>
@@ -3640,8 +4741,8 @@
         </p:nvSpPr>
         <p:spPr>
           <a:xfrm>
-            <a:off x="6309360" y="4187952"/>
-            <a:ext cx="2286000" cy="320040"/>
+            <a:off x="6309360" y="4133088"/>
+            <a:ext cx="2286000" cy="274320"/>
           </a:xfrm>
           <a:prstGeom prst="rect">
             <a:avLst/>
@@ -3659,7 +4760,7 @@
             <a:r>
               <a:rPr lang="en-US" sz="1400" dirty="0">
                 <a:solidFill>
-                  <a:srgbClr val="4A5656"/>
+                  <a:srgbClr val="6B7A90"/>
                 </a:solidFill>
               </a:rPr>
               <a:t>Cao</a:t>
@@ -3670,14 +4771,14 @@
       </p:sp>
       <p:sp>
         <p:nvSpPr>
-          <p:cNvPr id="29" name="truc-y-nhan"/>
+          <p:cNvPr id="29" name="truc-x"/>
           <p:cNvSpPr txBox="1"/>
           <p:nvPr/>
         </p:nvSpPr>
         <p:spPr>
           <a:xfrm>
-            <a:off x="457200" y="1188720"/>
-            <a:ext cx="1828800" cy="274320"/>
+            <a:off x="1554480" y="4407408"/>
+            <a:ext cx="7040880" cy="274320"/>
           </a:xfrm>
           <a:prstGeom prst="rect">
             <a:avLst/>
@@ -3689,18 +4790,63 @@
           <a:bodyPr wrap="square" lIns="0" tIns="0" rIns="0" bIns="0" rtlCol="0" anchor="ctr"/>
           <a:lstStyle/>
           <a:p>
-            <a:pPr indent="0" marL="0">
+            <a:pPr algn="ctr" indent="0" marL="0">
               <a:buNone/>
             </a:pPr>
             <a:r>
               <a:rPr lang="en-US" sz="1400" dirty="0">
                 <a:solidFill>
-                  <a:srgbClr val="4A5656"/>
-                </a:solidFill>
-              </a:rPr>
-              <a:t>Xác suất ↑</a:t>
+                  <a:srgbClr val="6B7A90"/>
+                </a:solidFill>
+              </a:rPr>
+              <a:t>Tác động →</a:t>
             </a:r>
             <a:endParaRPr lang="en-US" sz="1400" dirty="0"/>
+          </a:p>
+        </p:txBody>
+      </p:sp>
+      <p:sp>
+        <p:nvSpPr>
+          <p:cNvPr id="25" name="Slide Number Placeholder 0"/>
+          <p:cNvSpPr>
+            <a:spLocks noGrp="1"/>
+          </p:cNvSpPr>
+          <p:nvPr>
+            <p:ph type="sldNum" sz="quarter" idx="4294967295"/>
+          </p:nvPr>
+        </p:nvSpPr>
+        <p:spPr>
+          <a:xfrm>
+            <a:off x="8138160" y="4727448"/>
+            <a:ext cx="457200" cy="274320"/>
+          </a:xfrm>
+          <a:prstGeom prst="rect">
+            <a:avLst/>
+          </a:prstGeom>
+          <a:extLst>
+            <a:ext uri="{C572A759-6A51-4108-AA02-DFA0A04FC94B}">
+              <ma14:wrappingTextBoxFlag xmlns:ma14="http://schemas.microsoft.com/office/mac/drawingml/2011/main" val="0"/>
+            </a:ext>
+          </a:extLst>
+        </p:spPr>
+        <p:txBody>
+          <a:bodyPr/>
+          <a:lstStyle>
+            <a:lvl1pPr>
+              <a:defRPr sz="1100">
+                <a:solidFill>
+                  <a:srgbClr val="6B7A90"/>
+                </a:solidFill>
+              </a:defRPr>
+            </a:lvl1pPr>
+          </a:lstStyle>
+          <a:p>
+            <a:pPr algn="r"/>
+            <a:fld id="{F7021451-1387-4CA6-816F-3879F97B5CBC}" type="slidenum">
+              <a:rPr b="0" lang="en-US"/>
+              <a:t>5</a:t>
+            </a:fld>
+            <a:endParaRPr lang="en-US"/>
           </a:p>
         </p:txBody>
       </p:sp>
@@ -3739,8 +4885,8 @@
         </p:nvSpPr>
         <p:spPr>
           <a:xfrm>
-            <a:off x="457200" y="274320"/>
-            <a:ext cx="8229600" cy="868680"/>
+            <a:off x="548640" y="274320"/>
+            <a:ext cx="8046720" cy="868680"/>
           </a:xfrm>
           <a:prstGeom prst="rect">
             <a:avLst/>
@@ -3758,10 +4904,10 @@
             <a:r>
               <a:rPr lang="en-US" sz="2800" b="1" dirty="0">
                 <a:solidFill>
-                  <a:srgbClr val="0F3D3E"/>
-                </a:solidFill>
-              </a:rPr>
-              <a:t>Nhóm lập ma trận cho dự án tốt nghiệp của mình</a:t>
+                  <a:srgbClr val="0B2A4A"/>
+                </a:solidFill>
+              </a:rPr>
+              <a:t>Nhóm lập ma trận rủi ro cho dự án tốt nghiệp</a:t>
             </a:r>
             <a:endParaRPr lang="en-US" sz="2800" dirty="0"/>
           </a:p>
@@ -3769,77 +4915,427 @@
       </p:sp>
       <p:sp>
         <p:nvSpPr>
-          <p:cNvPr id="4" name="noi-dung"/>
+          <p:cNvPr id="4" name="the"/>
+          <p:cNvSpPr/>
+          <p:nvPr/>
+        </p:nvSpPr>
+        <p:spPr>
+          <a:xfrm>
+            <a:off x="548640" y="1325880"/>
+            <a:ext cx="8046720" cy="868680"/>
+          </a:xfrm>
+          <a:prstGeom prst="roundRect">
+            <a:avLst>
+              <a:gd name="adj" fmla="val 8421"/>
+            </a:avLst>
+          </a:prstGeom>
+          <a:solidFill>
+            <a:srgbClr val="F1F4F8"/>
+          </a:solidFill>
+          <a:ln w="12700">
+            <a:solidFill>
+              <a:srgbClr val="F1F4F8"/>
+            </a:solidFill>
+            <a:prstDash val="solid"/>
+          </a:ln>
+        </p:spPr>
+      </p:sp>
+      <p:sp>
+        <p:nvSpPr>
+          <p:cNvPr id="5" name="so-thu-tu"/>
+          <p:cNvSpPr/>
+          <p:nvPr/>
+        </p:nvSpPr>
+        <p:spPr>
+          <a:xfrm>
+            <a:off x="777240" y="1463040"/>
+            <a:ext cx="594360" cy="594360"/>
+          </a:xfrm>
+          <a:prstGeom prst="ellipse">
+            <a:avLst/>
+          </a:prstGeom>
+          <a:solidFill>
+            <a:srgbClr val="2E7D6B"/>
+          </a:solidFill>
+          <a:ln w="12700">
+            <a:solidFill>
+              <a:srgbClr val="2E7D6B"/>
+            </a:solidFill>
+            <a:prstDash val="solid"/>
+          </a:ln>
+        </p:spPr>
+      </p:sp>
+      <p:sp>
+        <p:nvSpPr>
+          <p:cNvPr id="6" name="so-thu-tu-chu"/>
           <p:cNvSpPr txBox="1"/>
           <p:nvPr/>
         </p:nvSpPr>
         <p:spPr>
           <a:xfrm>
-            <a:off x="457200" y="1463040"/>
-            <a:ext cx="8229600" cy="2377440"/>
-          </a:xfrm>
-          <a:prstGeom prst="rect">
-            <a:avLst/>
-          </a:prstGeom>
-          <a:noFill/>
-          <a:ln/>
-        </p:spPr>
-        <p:txBody>
-          <a:bodyPr wrap="square" lIns="0" tIns="0" rIns="0" bIns="0" rtlCol="0" anchor="t"/>
-          <a:lstStyle/>
-          <a:p>
-            <a:pPr marL="342900" indent="-342900">
-              <a:spcAft>
-                <a:spcPts val="800"/>
-              </a:spcAft>
-              <a:buSzPct val="100000"/>
-              <a:buChar char="•"/>
-            </a:pPr>
-            <a:r>
-              <a:rPr lang="en-US" sz="2200" dirty="0">
-                <a:solidFill>
-                  <a:srgbClr val="1B1F2A"/>
+            <a:off x="777240" y="1463040"/>
+            <a:ext cx="594360" cy="594360"/>
+          </a:xfrm>
+          <a:prstGeom prst="rect">
+            <a:avLst/>
+          </a:prstGeom>
+          <a:noFill/>
+          <a:ln/>
+        </p:spPr>
+        <p:txBody>
+          <a:bodyPr wrap="square" lIns="0" tIns="0" rIns="0" bIns="0" rtlCol="0" anchor="ctr"/>
+          <a:lstStyle/>
+          <a:p>
+            <a:pPr algn="ctr" indent="0" marL="0">
+              <a:buNone/>
+            </a:pPr>
+            <a:r>
+              <a:rPr lang="en-US" sz="2200" b="1" dirty="0">
+                <a:solidFill>
+                  <a:srgbClr val="FFFFFF"/>
+                </a:solidFill>
+                <a:latin typeface="Cambria" pitchFamily="34" charset="0"/>
+                <a:ea typeface="Cambria" pitchFamily="34" charset="-122"/>
+                <a:cs typeface="Cambria" pitchFamily="34" charset="-120"/>
+              </a:rPr>
+              <a:t>1</a:t>
+            </a:r>
+            <a:endParaRPr lang="en-US" sz="2200" dirty="0"/>
+          </a:p>
+        </p:txBody>
+      </p:sp>
+      <p:sp>
+        <p:nvSpPr>
+          <p:cNvPr id="7" name="the-chu"/>
+          <p:cNvSpPr txBox="1"/>
+          <p:nvPr/>
+        </p:nvSpPr>
+        <p:spPr>
+          <a:xfrm>
+            <a:off x="1600200" y="1399032"/>
+            <a:ext cx="6766560" cy="722376"/>
+          </a:xfrm>
+          <a:prstGeom prst="rect">
+            <a:avLst/>
+          </a:prstGeom>
+          <a:noFill/>
+          <a:ln/>
+        </p:spPr>
+        <p:txBody>
+          <a:bodyPr wrap="square" lIns="0" tIns="0" rIns="0" bIns="0" rtlCol="0" anchor="ctr"/>
+          <a:lstStyle/>
+          <a:p>
+            <a:pPr indent="0" marL="0">
+              <a:buNone/>
+            </a:pPr>
+            <a:r>
+              <a:rPr lang="en-US" sz="1800" b="1" dirty="0">
+                <a:solidFill>
+                  <a:srgbClr val="0B2A4A"/>
                 </a:solidFill>
               </a:rPr>
               <a:t>Nêu ít nhất 5 rủi ro của dự án</a:t>
             </a:r>
+            <a:endParaRPr lang="en-US" sz="1800" dirty="0"/>
+          </a:p>
+        </p:txBody>
+      </p:sp>
+      <p:sp>
+        <p:nvSpPr>
+          <p:cNvPr id="8" name="the"/>
+          <p:cNvSpPr/>
+          <p:nvPr/>
+        </p:nvSpPr>
+        <p:spPr>
+          <a:xfrm>
+            <a:off x="548640" y="2331720"/>
+            <a:ext cx="8046720" cy="868680"/>
+          </a:xfrm>
+          <a:prstGeom prst="roundRect">
+            <a:avLst>
+              <a:gd name="adj" fmla="val 8421"/>
+            </a:avLst>
+          </a:prstGeom>
+          <a:solidFill>
+            <a:srgbClr val="F1F4F8"/>
+          </a:solidFill>
+          <a:ln w="12700">
+            <a:solidFill>
+              <a:srgbClr val="F1F4F8"/>
+            </a:solidFill>
+            <a:prstDash val="solid"/>
+          </a:ln>
+        </p:spPr>
+      </p:sp>
+      <p:sp>
+        <p:nvSpPr>
+          <p:cNvPr id="9" name="so-thu-tu"/>
+          <p:cNvSpPr/>
+          <p:nvPr/>
+        </p:nvSpPr>
+        <p:spPr>
+          <a:xfrm>
+            <a:off x="777240" y="2468880"/>
+            <a:ext cx="594360" cy="594360"/>
+          </a:xfrm>
+          <a:prstGeom prst="ellipse">
+            <a:avLst/>
+          </a:prstGeom>
+          <a:solidFill>
+            <a:srgbClr val="2E7D6B"/>
+          </a:solidFill>
+          <a:ln w="12700">
+            <a:solidFill>
+              <a:srgbClr val="2E7D6B"/>
+            </a:solidFill>
+            <a:prstDash val="solid"/>
+          </a:ln>
+        </p:spPr>
+      </p:sp>
+      <p:sp>
+        <p:nvSpPr>
+          <p:cNvPr id="10" name="so-thu-tu-chu"/>
+          <p:cNvSpPr txBox="1"/>
+          <p:nvPr/>
+        </p:nvSpPr>
+        <p:spPr>
+          <a:xfrm>
+            <a:off x="777240" y="2468880"/>
+            <a:ext cx="594360" cy="594360"/>
+          </a:xfrm>
+          <a:prstGeom prst="rect">
+            <a:avLst/>
+          </a:prstGeom>
+          <a:noFill/>
+          <a:ln/>
+        </p:spPr>
+        <p:txBody>
+          <a:bodyPr wrap="square" lIns="0" tIns="0" rIns="0" bIns="0" rtlCol="0" anchor="ctr"/>
+          <a:lstStyle/>
+          <a:p>
+            <a:pPr algn="ctr" indent="0" marL="0">
+              <a:buNone/>
+            </a:pPr>
+            <a:r>
+              <a:rPr lang="en-US" sz="2200" b="1" dirty="0">
+                <a:solidFill>
+                  <a:srgbClr val="FFFFFF"/>
+                </a:solidFill>
+                <a:latin typeface="Cambria" pitchFamily="34" charset="0"/>
+                <a:ea typeface="Cambria" pitchFamily="34" charset="-122"/>
+                <a:cs typeface="Cambria" pitchFamily="34" charset="-120"/>
+              </a:rPr>
+              <a:t>2</a:t>
+            </a:r>
             <a:endParaRPr lang="en-US" sz="2200" dirty="0"/>
           </a:p>
-          <a:p>
-            <a:pPr marL="342900" indent="-342900">
-              <a:spcAft>
-                <a:spcPts val="800"/>
-              </a:spcAft>
-              <a:buSzPct val="100000"/>
-              <a:buChar char="•"/>
-            </a:pPr>
-            <a:r>
-              <a:rPr lang="en-US" sz="2200" dirty="0">
-                <a:solidFill>
-                  <a:srgbClr val="1B1F2A"/>
+        </p:txBody>
+      </p:sp>
+      <p:sp>
+        <p:nvSpPr>
+          <p:cNvPr id="11" name="the-chu"/>
+          <p:cNvSpPr txBox="1"/>
+          <p:nvPr/>
+        </p:nvSpPr>
+        <p:spPr>
+          <a:xfrm>
+            <a:off x="1600200" y="2404872"/>
+            <a:ext cx="6766560" cy="722376"/>
+          </a:xfrm>
+          <a:prstGeom prst="rect">
+            <a:avLst/>
+          </a:prstGeom>
+          <a:noFill/>
+          <a:ln/>
+        </p:spPr>
+        <p:txBody>
+          <a:bodyPr wrap="square" lIns="0" tIns="0" rIns="0" bIns="0" rtlCol="0" anchor="ctr"/>
+          <a:lstStyle/>
+          <a:p>
+            <a:pPr indent="0" marL="0">
+              <a:buNone/>
+            </a:pPr>
+            <a:r>
+              <a:rPr lang="en-US" sz="1800" b="1" dirty="0">
+                <a:solidFill>
+                  <a:srgbClr val="0B2A4A"/>
                 </a:solidFill>
               </a:rPr>
               <a:t>Xếp mỗi rủi ro vào ma trận</a:t>
             </a:r>
+            <a:endParaRPr lang="en-US" sz="1800" dirty="0"/>
+          </a:p>
+        </p:txBody>
+      </p:sp>
+      <p:sp>
+        <p:nvSpPr>
+          <p:cNvPr id="12" name="the"/>
+          <p:cNvSpPr/>
+          <p:nvPr/>
+        </p:nvSpPr>
+        <p:spPr>
+          <a:xfrm>
+            <a:off x="548640" y="3337560"/>
+            <a:ext cx="8046720" cy="868680"/>
+          </a:xfrm>
+          <a:prstGeom prst="roundRect">
+            <a:avLst>
+              <a:gd name="adj" fmla="val 8421"/>
+            </a:avLst>
+          </a:prstGeom>
+          <a:solidFill>
+            <a:srgbClr val="F1F4F8"/>
+          </a:solidFill>
+          <a:ln w="12700">
+            <a:solidFill>
+              <a:srgbClr val="F1F4F8"/>
+            </a:solidFill>
+            <a:prstDash val="solid"/>
+          </a:ln>
+        </p:spPr>
+      </p:sp>
+      <p:sp>
+        <p:nvSpPr>
+          <p:cNvPr id="13" name="so-thu-tu"/>
+          <p:cNvSpPr/>
+          <p:nvPr/>
+        </p:nvSpPr>
+        <p:spPr>
+          <a:xfrm>
+            <a:off x="777240" y="3474720"/>
+            <a:ext cx="594360" cy="594360"/>
+          </a:xfrm>
+          <a:prstGeom prst="ellipse">
+            <a:avLst/>
+          </a:prstGeom>
+          <a:solidFill>
+            <a:srgbClr val="2E7D6B"/>
+          </a:solidFill>
+          <a:ln w="12700">
+            <a:solidFill>
+              <a:srgbClr val="2E7D6B"/>
+            </a:solidFill>
+            <a:prstDash val="solid"/>
+          </a:ln>
+        </p:spPr>
+      </p:sp>
+      <p:sp>
+        <p:nvSpPr>
+          <p:cNvPr id="14" name="so-thu-tu-chu"/>
+          <p:cNvSpPr txBox="1"/>
+          <p:nvPr/>
+        </p:nvSpPr>
+        <p:spPr>
+          <a:xfrm>
+            <a:off x="777240" y="3474720"/>
+            <a:ext cx="594360" cy="594360"/>
+          </a:xfrm>
+          <a:prstGeom prst="rect">
+            <a:avLst/>
+          </a:prstGeom>
+          <a:noFill/>
+          <a:ln/>
+        </p:spPr>
+        <p:txBody>
+          <a:bodyPr wrap="square" lIns="0" tIns="0" rIns="0" bIns="0" rtlCol="0" anchor="ctr"/>
+          <a:lstStyle/>
+          <a:p>
+            <a:pPr algn="ctr" indent="0" marL="0">
+              <a:buNone/>
+            </a:pPr>
+            <a:r>
+              <a:rPr lang="en-US" sz="2200" b="1" dirty="0">
+                <a:solidFill>
+                  <a:srgbClr val="FFFFFF"/>
+                </a:solidFill>
+                <a:latin typeface="Cambria" pitchFamily="34" charset="0"/>
+                <a:ea typeface="Cambria" pitchFamily="34" charset="-122"/>
+                <a:cs typeface="Cambria" pitchFamily="34" charset="-120"/>
+              </a:rPr>
+              <a:t>3</a:t>
+            </a:r>
             <a:endParaRPr lang="en-US" sz="2200" dirty="0"/>
           </a:p>
-          <a:p>
-            <a:pPr marL="342900" indent="-342900">
-              <a:spcAft>
-                <a:spcPts val="800"/>
-              </a:spcAft>
-              <a:buSzPct val="100000"/>
-              <a:buChar char="•"/>
-            </a:pPr>
-            <a:r>
-              <a:rPr lang="en-US" sz="2200" dirty="0">
-                <a:solidFill>
-                  <a:srgbClr val="1B1F2A"/>
+        </p:txBody>
+      </p:sp>
+      <p:sp>
+        <p:nvSpPr>
+          <p:cNvPr id="15" name="the-chu"/>
+          <p:cNvSpPr txBox="1"/>
+          <p:nvPr/>
+        </p:nvSpPr>
+        <p:spPr>
+          <a:xfrm>
+            <a:off x="1600200" y="3410712"/>
+            <a:ext cx="6766560" cy="722376"/>
+          </a:xfrm>
+          <a:prstGeom prst="rect">
+            <a:avLst/>
+          </a:prstGeom>
+          <a:noFill/>
+          <a:ln/>
+        </p:spPr>
+        <p:txBody>
+          <a:bodyPr wrap="square" lIns="0" tIns="0" rIns="0" bIns="0" rtlCol="0" anchor="ctr"/>
+          <a:lstStyle/>
+          <a:p>
+            <a:pPr indent="0" marL="0">
+              <a:buNone/>
+            </a:pPr>
+            <a:r>
+              <a:rPr lang="en-US" sz="1800" b="1" dirty="0">
+                <a:solidFill>
+                  <a:srgbClr val="0B2A4A"/>
                 </a:solidFill>
               </a:rPr>
               <a:t>Chọn rủi ro cao nhất, đề xuất biện pháp ứng phó</a:t>
             </a:r>
-            <a:endParaRPr lang="en-US" sz="2200" dirty="0"/>
+            <a:endParaRPr lang="en-US" sz="1800" dirty="0"/>
+          </a:p>
+        </p:txBody>
+      </p:sp>
+      <p:sp>
+        <p:nvSpPr>
+          <p:cNvPr id="25" name="Slide Number Placeholder 0"/>
+          <p:cNvSpPr>
+            <a:spLocks noGrp="1"/>
+          </p:cNvSpPr>
+          <p:nvPr>
+            <p:ph type="sldNum" sz="quarter" idx="4294967295"/>
+          </p:nvPr>
+        </p:nvSpPr>
+        <p:spPr>
+          <a:xfrm>
+            <a:off x="8138160" y="4727448"/>
+            <a:ext cx="457200" cy="274320"/>
+          </a:xfrm>
+          <a:prstGeom prst="rect">
+            <a:avLst/>
+          </a:prstGeom>
+          <a:extLst>
+            <a:ext uri="{C572A759-6A51-4108-AA02-DFA0A04FC94B}">
+              <ma14:wrappingTextBoxFlag xmlns:ma14="http://schemas.microsoft.com/office/mac/drawingml/2011/main" val="0"/>
+            </a:ext>
+          </a:extLst>
+        </p:spPr>
+        <p:txBody>
+          <a:bodyPr/>
+          <a:lstStyle>
+            <a:lvl1pPr>
+              <a:defRPr sz="1100">
+                <a:solidFill>
+                  <a:srgbClr val="6B7A90"/>
+                </a:solidFill>
+              </a:defRPr>
+            </a:lvl1pPr>
+          </a:lstStyle>
+          <a:p>
+            <a:pPr algn="r"/>
+            <a:fld id="{F7021451-1387-4CA6-816F-3879F97B5CBC}" type="slidenum">
+              <a:rPr b="0" lang="en-US"/>
+              <a:t>6</a:t>
+            </a:fld>
+            <a:endParaRPr lang="en-US"/>
           </a:p>
         </p:txBody>
       </p:sp>
@@ -3878,8 +5374,8 @@
         </p:nvSpPr>
         <p:spPr>
           <a:xfrm>
-            <a:off x="457200" y="274320"/>
-            <a:ext cx="8229600" cy="868680"/>
+            <a:off x="548640" y="274320"/>
+            <a:ext cx="8046720" cy="868680"/>
           </a:xfrm>
           <a:prstGeom prst="rect">
             <a:avLst/>
@@ -3897,10 +5393,10 @@
             <a:r>
               <a:rPr lang="en-US" sz="2800" b="1" dirty="0">
                 <a:solidFill>
-                  <a:srgbClr val="0F3D3E"/>
-                </a:solidFill>
-              </a:rPr>
-              <a:t>Tóm tắt và bài tập</a:t>
+                  <a:srgbClr val="0B2A4A"/>
+                </a:solidFill>
+              </a:rPr>
+              <a:t>Ba điều cần nhớ và bài tập về nhà</a:t>
             </a:r>
             <a:endParaRPr lang="en-US" sz="2800" dirty="0"/>
           </a:p>
@@ -3908,14 +5404,101 @@
       </p:sp>
       <p:sp>
         <p:nvSpPr>
-          <p:cNvPr id="4" name="noi-dung"/>
+          <p:cNvPr id="4" name="nhan-xet"/>
+          <p:cNvSpPr/>
+          <p:nvPr/>
+        </p:nvSpPr>
+        <p:spPr>
+          <a:xfrm>
+            <a:off x="548640" y="1463040"/>
+            <a:ext cx="2560320" cy="2286000"/>
+          </a:xfrm>
+          <a:prstGeom prst="roundRect">
+            <a:avLst>
+              <a:gd name="adj" fmla="val 3200"/>
+            </a:avLst>
+          </a:prstGeom>
+          <a:solidFill>
+            <a:srgbClr val="F1F4F8"/>
+          </a:solidFill>
+          <a:ln w="12700">
+            <a:solidFill>
+              <a:srgbClr val="F1F4F8"/>
+            </a:solidFill>
+            <a:prstDash val="solid"/>
+          </a:ln>
+        </p:spPr>
+      </p:sp>
+      <p:pic>
+        <p:nvPicPr>
+          <p:cNvPr id="5" name="bieu-tuong" descr="Biểu tượng">    </p:cNvPr>
+          <p:cNvPicPr>
+            <a:picLocks noChangeAspect="1"/>
+          </p:cNvPicPr>
+          <p:nvPr/>
+        </p:nvPicPr>
+        <p:blipFill>
+          <a:blip r:embed="rId1"/>
+          <a:stretch>
+            <a:fillRect/>
+          </a:stretch>
+        </p:blipFill>
+        <p:spPr>
+          <a:xfrm>
+            <a:off x="731520" y="1664208"/>
+            <a:ext cx="274320" cy="274320"/>
+          </a:xfrm>
+          <a:prstGeom prst="rect">
+            <a:avLst/>
+          </a:prstGeom>
+        </p:spPr>
+      </p:pic>
+      <p:sp>
+        <p:nvSpPr>
+          <p:cNvPr id="6" name="nhan-xet-tieu-de"/>
           <p:cNvSpPr txBox="1"/>
           <p:nvPr/>
         </p:nvSpPr>
         <p:spPr>
           <a:xfrm>
-            <a:off x="457200" y="1463040"/>
-            <a:ext cx="8229600" cy="2377440"/>
+            <a:off x="1097280" y="1645920"/>
+            <a:ext cx="1828800" cy="329184"/>
+          </a:xfrm>
+          <a:prstGeom prst="rect">
+            <a:avLst/>
+          </a:prstGeom>
+          <a:noFill/>
+          <a:ln/>
+        </p:spPr>
+        <p:txBody>
+          <a:bodyPr wrap="square" lIns="0" tIns="0" rIns="0" bIns="0" rtlCol="0" anchor="ctr"/>
+          <a:lstStyle/>
+          <a:p>
+            <a:pPr indent="0" marL="0">
+              <a:buNone/>
+            </a:pPr>
+            <a:r>
+              <a:rPr lang="en-US" sz="1800" b="1" dirty="0">
+                <a:solidFill>
+                  <a:srgbClr val="0B2A4A"/>
+                </a:solidFill>
+              </a:rPr>
+              <a:t>Ba bước</a:t>
+            </a:r>
+            <a:endParaRPr lang="en-US" sz="1800" dirty="0"/>
+          </a:p>
+        </p:txBody>
+      </p:sp>
+      <p:sp>
+        <p:nvSpPr>
+          <p:cNvPr id="7" name="nhan-xet-chu"/>
+          <p:cNvSpPr txBox="1"/>
+          <p:nvPr/>
+        </p:nvSpPr>
+        <p:spPr>
+          <a:xfrm>
+            <a:off x="731520" y="2103120"/>
+            <a:ext cx="2194560" cy="1554480"/>
           </a:xfrm>
           <a:prstGeom prst="rect">
             <a:avLst/>
@@ -3935,14 +5518,14 @@
               <a:buChar char="•"/>
             </a:pPr>
             <a:r>
-              <a:rPr lang="en-US" sz="2200" dirty="0">
-                <a:solidFill>
-                  <a:srgbClr val="1B1F2A"/>
-                </a:solidFill>
-              </a:rPr>
-              <a:t>Nhận diện, đánh giá, ứng phó là ba bước</a:t>
-            </a:r>
-            <a:endParaRPr lang="en-US" sz="2200" dirty="0"/>
+              <a:rPr lang="en-US" sz="1600" dirty="0">
+                <a:solidFill>
+                  <a:srgbClr val="1A2433"/>
+                </a:solidFill>
+              </a:rPr>
+              <a:t>Nhận diện</a:t>
+            </a:r>
+            <a:endParaRPr lang="en-US" sz="1600" dirty="0"/>
           </a:p>
           <a:p>
             <a:pPr marL="342900" indent="-342900">
@@ -3953,14 +5536,14 @@
               <a:buChar char="•"/>
             </a:pPr>
             <a:r>
-              <a:rPr lang="en-US" sz="2200" dirty="0">
-                <a:solidFill>
-                  <a:srgbClr val="1B1F2A"/>
-                </a:solidFill>
-              </a:rPr>
-              <a:t>Bài tập: hoàn thiện ma trận rủi ro của nhóm</a:t>
-            </a:r>
-            <a:endParaRPr lang="en-US" sz="2200" dirty="0"/>
+              <a:rPr lang="en-US" sz="1600" dirty="0">
+                <a:solidFill>
+                  <a:srgbClr val="1A2433"/>
+                </a:solidFill>
+              </a:rPr>
+              <a:t>Đánh giá</a:t>
+            </a:r>
+            <a:endParaRPr lang="en-US" sz="1600" dirty="0"/>
           </a:p>
           <a:p>
             <a:pPr marL="342900" indent="-342900">
@@ -3971,14 +5554,412 @@
               <a:buChar char="•"/>
             </a:pPr>
             <a:r>
-              <a:rPr lang="en-US" sz="2200" dirty="0">
-                <a:solidFill>
-                  <a:srgbClr val="1B1F2A"/>
-                </a:solidFill>
-              </a:rPr>
-              <a:t>Học liệu: giáo trình học phần, chương rủi ro</a:t>
-            </a:r>
-            <a:endParaRPr lang="en-US" sz="2200" dirty="0"/>
+              <a:rPr lang="en-US" sz="1600" dirty="0">
+                <a:solidFill>
+                  <a:srgbClr val="1A2433"/>
+                </a:solidFill>
+              </a:rPr>
+              <a:t>Ứng phó</a:t>
+            </a:r>
+            <a:endParaRPr lang="en-US" sz="1600" dirty="0"/>
+          </a:p>
+        </p:txBody>
+      </p:sp>
+      <p:sp>
+        <p:nvSpPr>
+          <p:cNvPr id="8" name="nhan-xet"/>
+          <p:cNvSpPr/>
+          <p:nvPr/>
+        </p:nvSpPr>
+        <p:spPr>
+          <a:xfrm>
+            <a:off x="3291840" y="1463040"/>
+            <a:ext cx="2560320" cy="2286000"/>
+          </a:xfrm>
+          <a:prstGeom prst="roundRect">
+            <a:avLst>
+              <a:gd name="adj" fmla="val 3200"/>
+            </a:avLst>
+          </a:prstGeom>
+          <a:solidFill>
+            <a:srgbClr val="F1F4F8"/>
+          </a:solidFill>
+          <a:ln w="12700">
+            <a:solidFill>
+              <a:srgbClr val="F1F4F8"/>
+            </a:solidFill>
+            <a:prstDash val="solid"/>
+          </a:ln>
+        </p:spPr>
+      </p:sp>
+      <p:pic>
+        <p:nvPicPr>
+          <p:cNvPr id="9" name="bieu-tuong" descr="Biểu tượng">    </p:cNvPr>
+          <p:cNvPicPr>
+            <a:picLocks noChangeAspect="1"/>
+          </p:cNvPicPr>
+          <p:nvPr/>
+        </p:nvPicPr>
+        <p:blipFill>
+          <a:blip r:embed="rId2"/>
+          <a:stretch>
+            <a:fillRect/>
+          </a:stretch>
+        </p:blipFill>
+        <p:spPr>
+          <a:xfrm>
+            <a:off x="3474720" y="1664208"/>
+            <a:ext cx="274320" cy="274320"/>
+          </a:xfrm>
+          <a:prstGeom prst="rect">
+            <a:avLst/>
+          </a:prstGeom>
+        </p:spPr>
+      </p:pic>
+      <p:sp>
+        <p:nvSpPr>
+          <p:cNvPr id="10" name="nhan-xet-tieu-de"/>
+          <p:cNvSpPr txBox="1"/>
+          <p:nvPr/>
+        </p:nvSpPr>
+        <p:spPr>
+          <a:xfrm>
+            <a:off x="3840480" y="1645920"/>
+            <a:ext cx="1828800" cy="329184"/>
+          </a:xfrm>
+          <a:prstGeom prst="rect">
+            <a:avLst/>
+          </a:prstGeom>
+          <a:noFill/>
+          <a:ln/>
+        </p:spPr>
+        <p:txBody>
+          <a:bodyPr wrap="square" lIns="0" tIns="0" rIns="0" bIns="0" rtlCol="0" anchor="ctr"/>
+          <a:lstStyle/>
+          <a:p>
+            <a:pPr indent="0" marL="0">
+              <a:buNone/>
+            </a:pPr>
+            <a:r>
+              <a:rPr lang="en-US" sz="1800" b="1" dirty="0">
+                <a:solidFill>
+                  <a:srgbClr val="0B2A4A"/>
+                </a:solidFill>
+              </a:rPr>
+              <a:t>Bài tập</a:t>
+            </a:r>
+            <a:endParaRPr lang="en-US" sz="1800" dirty="0"/>
+          </a:p>
+        </p:txBody>
+      </p:sp>
+      <p:sp>
+        <p:nvSpPr>
+          <p:cNvPr id="11" name="nhan-xet-chu"/>
+          <p:cNvSpPr txBox="1"/>
+          <p:nvPr/>
+        </p:nvSpPr>
+        <p:spPr>
+          <a:xfrm>
+            <a:off x="3474720" y="2103120"/>
+            <a:ext cx="2194560" cy="1554480"/>
+          </a:xfrm>
+          <a:prstGeom prst="rect">
+            <a:avLst/>
+          </a:prstGeom>
+          <a:noFill/>
+          <a:ln/>
+        </p:spPr>
+        <p:txBody>
+          <a:bodyPr wrap="square" lIns="0" tIns="0" rIns="0" bIns="0" rtlCol="0" anchor="t"/>
+          <a:lstStyle/>
+          <a:p>
+            <a:pPr indent="0" marL="0">
+              <a:spcAft>
+                <a:spcPts val="800"/>
+              </a:spcAft>
+              <a:buNone/>
+            </a:pPr>
+            <a:r>
+              <a:rPr lang="en-US" sz="1600" dirty="0">
+                <a:solidFill>
+                  <a:srgbClr val="1A2433"/>
+                </a:solidFill>
+              </a:rPr>
+              <a:t>Hoàn thiện ma trận rủi ro của nhóm</a:t>
+            </a:r>
+            <a:endParaRPr lang="en-US" sz="1600" dirty="0"/>
+          </a:p>
+        </p:txBody>
+      </p:sp>
+      <p:sp>
+        <p:nvSpPr>
+          <p:cNvPr id="12" name="nhan-xet"/>
+          <p:cNvSpPr/>
+          <p:nvPr/>
+        </p:nvSpPr>
+        <p:spPr>
+          <a:xfrm>
+            <a:off x="6035040" y="1463040"/>
+            <a:ext cx="2560320" cy="2286000"/>
+          </a:xfrm>
+          <a:prstGeom prst="roundRect">
+            <a:avLst>
+              <a:gd name="adj" fmla="val 3200"/>
+            </a:avLst>
+          </a:prstGeom>
+          <a:solidFill>
+            <a:srgbClr val="F1F4F8"/>
+          </a:solidFill>
+          <a:ln w="12700">
+            <a:solidFill>
+              <a:srgbClr val="F1F4F8"/>
+            </a:solidFill>
+            <a:prstDash val="solid"/>
+          </a:ln>
+        </p:spPr>
+      </p:sp>
+      <p:pic>
+        <p:nvPicPr>
+          <p:cNvPr id="13" name="bieu-tuong" descr="Biểu tượng">    </p:cNvPr>
+          <p:cNvPicPr>
+            <a:picLocks noChangeAspect="1"/>
+          </p:cNvPicPr>
+          <p:nvPr/>
+        </p:nvPicPr>
+        <p:blipFill>
+          <a:blip r:embed="rId3"/>
+          <a:stretch>
+            <a:fillRect/>
+          </a:stretch>
+        </p:blipFill>
+        <p:spPr>
+          <a:xfrm>
+            <a:off x="6217920" y="1664208"/>
+            <a:ext cx="274320" cy="274320"/>
+          </a:xfrm>
+          <a:prstGeom prst="rect">
+            <a:avLst/>
+          </a:prstGeom>
+        </p:spPr>
+      </p:pic>
+      <p:sp>
+        <p:nvSpPr>
+          <p:cNvPr id="14" name="nhan-xet-tieu-de"/>
+          <p:cNvSpPr txBox="1"/>
+          <p:nvPr/>
+        </p:nvSpPr>
+        <p:spPr>
+          <a:xfrm>
+            <a:off x="6583680" y="1645920"/>
+            <a:ext cx="1828800" cy="329184"/>
+          </a:xfrm>
+          <a:prstGeom prst="rect">
+            <a:avLst/>
+          </a:prstGeom>
+          <a:noFill/>
+          <a:ln/>
+        </p:spPr>
+        <p:txBody>
+          <a:bodyPr wrap="square" lIns="0" tIns="0" rIns="0" bIns="0" rtlCol="0" anchor="ctr"/>
+          <a:lstStyle/>
+          <a:p>
+            <a:pPr indent="0" marL="0">
+              <a:buNone/>
+            </a:pPr>
+            <a:r>
+              <a:rPr lang="en-US" sz="1800" b="1" dirty="0">
+                <a:solidFill>
+                  <a:srgbClr val="0B2A4A"/>
+                </a:solidFill>
+              </a:rPr>
+              <a:t>Học liệu</a:t>
+            </a:r>
+            <a:endParaRPr lang="en-US" sz="1800" dirty="0"/>
+          </a:p>
+        </p:txBody>
+      </p:sp>
+      <p:sp>
+        <p:nvSpPr>
+          <p:cNvPr id="15" name="nhan-xet-chu"/>
+          <p:cNvSpPr txBox="1"/>
+          <p:nvPr/>
+        </p:nvSpPr>
+        <p:spPr>
+          <a:xfrm>
+            <a:off x="6217920" y="2103120"/>
+            <a:ext cx="2194560" cy="1554480"/>
+          </a:xfrm>
+          <a:prstGeom prst="rect">
+            <a:avLst/>
+          </a:prstGeom>
+          <a:noFill/>
+          <a:ln/>
+        </p:spPr>
+        <p:txBody>
+          <a:bodyPr wrap="square" lIns="0" tIns="0" rIns="0" bIns="0" rtlCol="0" anchor="t"/>
+          <a:lstStyle/>
+          <a:p>
+            <a:pPr indent="0" marL="0">
+              <a:spcAft>
+                <a:spcPts val="800"/>
+              </a:spcAft>
+              <a:buNone/>
+            </a:pPr>
+            <a:r>
+              <a:rPr lang="en-US" sz="1600" dirty="0">
+                <a:solidFill>
+                  <a:srgbClr val="1A2433"/>
+                </a:solidFill>
+              </a:rPr>
+              <a:t>Giáo trình học phần, chương rủi ro</a:t>
+            </a:r>
+            <a:endParaRPr lang="en-US" sz="1600" dirty="0"/>
+          </a:p>
+        </p:txBody>
+      </p:sp>
+      <p:sp>
+        <p:nvSpPr>
+          <p:cNvPr id="25" name="Slide Number Placeholder 0"/>
+          <p:cNvSpPr>
+            <a:spLocks noGrp="1"/>
+          </p:cNvSpPr>
+          <p:nvPr>
+            <p:ph type="sldNum" sz="quarter" idx="4294967295"/>
+          </p:nvPr>
+        </p:nvSpPr>
+        <p:spPr>
+          <a:xfrm>
+            <a:off x="8138160" y="4727448"/>
+            <a:ext cx="457200" cy="274320"/>
+          </a:xfrm>
+          <a:prstGeom prst="rect">
+            <a:avLst/>
+          </a:prstGeom>
+          <a:extLst>
+            <a:ext uri="{C572A759-6A51-4108-AA02-DFA0A04FC94B}">
+              <ma14:wrappingTextBoxFlag xmlns:ma14="http://schemas.microsoft.com/office/mac/drawingml/2011/main" val="0"/>
+            </a:ext>
+          </a:extLst>
+        </p:spPr>
+        <p:txBody>
+          <a:bodyPr/>
+          <a:lstStyle>
+            <a:lvl1pPr>
+              <a:defRPr sz="1100">
+                <a:solidFill>
+                  <a:srgbClr val="6B7A90"/>
+                </a:solidFill>
+              </a:defRPr>
+            </a:lvl1pPr>
+          </a:lstStyle>
+          <a:p>
+            <a:pPr algn="r"/>
+            <a:fld id="{F7021451-1387-4CA6-816F-3879F97B5CBC}" type="slidenum">
+              <a:rPr b="0" lang="en-US"/>
+              <a:t>7</a:t>
+            </a:fld>
+            <a:endParaRPr lang="en-US"/>
+          </a:p>
+        </p:txBody>
+      </p:sp>
+    </p:spTree>
+  </p:cSld>
+  <p:clrMapOvr>
+    <a:masterClrMapping/>
+  </p:clrMapOvr>
+</p:sld>
+</file>
+
+<file path=ppt/slides/slide8.xml><?xml version="1.0" encoding="utf-8"?>
+<p:sld xmlns:a="http://schemas.openxmlformats.org/drawingml/2006/main" xmlns:r="http://schemas.openxmlformats.org/officeDocument/2006/relationships" xmlns:p="http://schemas.openxmlformats.org/presentationml/2006/main">
+  <p:cSld name="Slide 8">
+    <p:spTree>
+      <p:nvGrpSpPr>
+        <p:cNvPr id="1" name=""/>
+        <p:cNvGrpSpPr/>
+        <p:nvPr/>
+      </p:nvGrpSpPr>
+      <p:grpSpPr>
+        <a:xfrm>
+          <a:off x="0" y="0"/>
+          <a:ext cx="0" cy="0"/>
+          <a:chOff x="0" y="0"/>
+          <a:chExt cx="0" cy="0"/>
+        </a:xfrm>
+      </p:grpSpPr>
+      <p:sp>
+        <p:nvSpPr>
+          <p:cNvPr id="2" name="Text 1"/>
+          <p:cNvSpPr/>
+          <p:nvPr>
+            <p:ph idx="102" type="title" hasCustomPrompt="1"/>
+          </p:nvPr>
+        </p:nvSpPr>
+        <p:spPr>
+          <a:xfrm>
+            <a:off x="548640" y="1417320"/>
+            <a:ext cx="6035040" cy="1554480"/>
+          </a:xfrm>
+          <a:prstGeom prst="rect">
+            <a:avLst/>
+          </a:prstGeom>
+          <a:noFill/>
+          <a:ln/>
+        </p:spPr>
+        <p:txBody>
+          <a:bodyPr wrap="square" lIns="0" tIns="0" rIns="0" bIns="0" rtlCol="0" anchor="b"/>
+          <a:lstStyle/>
+          <a:p>
+            <a:pPr algn="l" indent="0" marL="0">
+              <a:buNone/>
+            </a:pPr>
+            <a:r>
+              <a:rPr lang="en-US" sz="3600" b="1" dirty="0">
+                <a:solidFill>
+                  <a:srgbClr val="FFFFFF"/>
+                </a:solidFill>
+              </a:rPr>
+              <a:t>Hỏi và đáp</a:t>
+            </a:r>
+            <a:endParaRPr lang="en-US" sz="3600" dirty="0"/>
+          </a:p>
+        </p:txBody>
+      </p:sp>
+      <p:sp>
+        <p:nvSpPr>
+          <p:cNvPr id="3" name="Text 1"/>
+          <p:cNvSpPr/>
+          <p:nvPr>
+            <p:ph idx="103" type="body" hasCustomPrompt="1"/>
+          </p:nvPr>
+        </p:nvSpPr>
+        <p:spPr>
+          <a:xfrm>
+            <a:off x="548640" y="3154680"/>
+            <a:ext cx="6035040" cy="1097280"/>
+          </a:xfrm>
+          <a:prstGeom prst="rect">
+            <a:avLst/>
+          </a:prstGeom>
+          <a:noFill/>
+          <a:ln/>
+        </p:spPr>
+        <p:txBody>
+          <a:bodyPr wrap="square" lIns="0" tIns="0" rIns="0" bIns="0" rtlCol="0" anchor="t"/>
+          <a:lstStyle/>
+          <a:p>
+            <a:pPr algn="l" indent="0" marL="0">
+              <a:buNone/>
+            </a:pPr>
+            <a:r>
+              <a:rPr lang="en-US" sz="1800" dirty="0">
+                <a:solidFill>
+                  <a:srgbClr val="D6E2F0"/>
+                </a:solidFill>
+              </a:rPr>
+              <a:t>Câu hỏi của lớp trước khi kết thúc buổi học</a:t>
+            </a:r>
+            <a:endParaRPr lang="en-US" sz="1800" dirty="0"/>
           </a:p>
         </p:txBody>
       </p:sp>
@@ -3991,47 +5972,47 @@
 </file>
 
 <file path=ppt/theme/theme1.xml><?xml version="1.0" encoding="utf-8"?>
-<a:theme xmlns:a="http://schemas.openxmlformats.org/drawingml/2006/main" name="Thu nghiem">
+<a:theme xmlns:a="http://schemas.openxmlformats.org/drawingml/2006/main" name="Dai hoc">
   <a:themeElements>
-    <a:clrScheme name="Thu nghiem">
+    <a:clrScheme name="Dai hoc">
       <a:dk1>
-        <a:srgbClr val="1B1F2A"/>
+        <a:srgbClr val="1A2433"/>
       </a:dk1>
       <a:lt1>
         <a:srgbClr val="FFFFFF"/>
       </a:lt1>
       <a:dk2>
-        <a:srgbClr val="0F3D3E"/>
+        <a:srgbClr val="0B2A4A"/>
       </a:dk2>
       <a:lt2>
-        <a:srgbClr val="EEF3F2"/>
+        <a:srgbClr val="F1F4F8"/>
       </a:lt2>
       <a:accent1>
-        <a:srgbClr val="0F6E6E"/>
+        <a:srgbClr val="1F4E8C"/>
       </a:accent1>
       <a:accent2>
-        <a:srgbClr val="D9822B"/>
+        <a:srgbClr val="B8902B"/>
       </a:accent2>
       <a:accent3>
-        <a:srgbClr val="5B8DB8"/>
+        <a:srgbClr val="2E7D6B"/>
       </a:accent3>
       <a:accent4>
-        <a:srgbClr val="7A8B8B"/>
+        <a:srgbClr val="6B7A90"/>
       </a:accent4>
       <a:accent5>
-        <a:srgbClr val="B5473A"/>
+        <a:srgbClr val="A23B3B"/>
       </a:accent5>
       <a:accent6>
-        <a:srgbClr val="3E7C4F"/>
+        <a:srgbClr val="5B8DB8"/>
       </a:accent6>
       <a:hlink>
-        <a:srgbClr val="0F6E6E"/>
+        <a:srgbClr val="1F4E8C"/>
       </a:hlink>
       <a:folHlink>
-        <a:srgbClr val="7A8B8B"/>
+        <a:srgbClr val="6B7A90"/>
       </a:folHlink>
     </a:clrScheme>
-    <a:fontScheme name="Thu nghiem">
+    <a:fontScheme name="Dai hoc">
       <a:majorFont>
         <a:latin typeface="Cambria"/>
         <a:ea typeface=""/>
